--- a/artifacts/Software_Architecture.pptx
+++ b/artifacts/Software_Architecture.pptx
@@ -2638,6 +2638,84 @@
         </p:nvSpPr>
         <p:spPr>
           <a:xfrm>
+            <a:off x="502920" y="164592"/>
+            <a:ext cx="7772400" cy="201168"/>
+          </a:xfrm>
+          <a:prstGeom prst="rect">
+            <a:avLst/>
+          </a:prstGeom>
+          <a:noFill/>
+          <a:ln/>
+        </p:spPr>
+        <p:txBody>
+          <a:bodyPr wrap="square" lIns="0" tIns="0" rIns="0" bIns="0" rtlCol="0" anchor="ctr"/>
+          <a:lstStyle/>
+          <a:p>
+            <a:pPr indent="0" marL="0">
+              <a:buNone/>
+            </a:pPr>
+            <a:r>
+              <a:rPr lang="en-US" sz="1000" b="1" dirty="0">
+                <a:solidFill>
+                  <a:srgbClr val="FECACA"/>
+                </a:solidFill>
+                <a:latin typeface="Calibri" pitchFamily="34" charset="0"/>
+                <a:ea typeface="Calibri" pitchFamily="34" charset="-122"/>
+                <a:cs typeface="Calibri" pitchFamily="34" charset="-120"/>
+              </a:rPr>
+              <a:t>LOCKHEED MARTIN PROPRIETARY INFORMATION</a:t>
+            </a:r>
+            <a:endParaRPr lang="en-US" sz="1000" dirty="0"/>
+          </a:p>
+        </p:txBody>
+      </p:sp>
+      <p:sp>
+        <p:nvSpPr>
+          <p:cNvPr id="5" name="Text 3"/>
+          <p:cNvSpPr/>
+          <p:nvPr/>
+        </p:nvSpPr>
+        <p:spPr>
+          <a:xfrm>
+            <a:off x="502920" y="4828032"/>
+            <a:ext cx="8046720" cy="201168"/>
+          </a:xfrm>
+          <a:prstGeom prst="rect">
+            <a:avLst/>
+          </a:prstGeom>
+          <a:noFill/>
+          <a:ln/>
+        </p:spPr>
+        <p:txBody>
+          <a:bodyPr wrap="square" lIns="0" tIns="0" rIns="0" bIns="0" rtlCol="0" anchor="ctr"/>
+          <a:lstStyle/>
+          <a:p>
+            <a:pPr indent="0" marL="0">
+              <a:buNone/>
+            </a:pPr>
+            <a:r>
+              <a:rPr lang="en-US" sz="1000" dirty="0">
+                <a:solidFill>
+                  <a:srgbClr val="94A3B8"/>
+                </a:solidFill>
+                <a:latin typeface="Calibri" pitchFamily="34" charset="0"/>
+                <a:ea typeface="Calibri" pitchFamily="34" charset="-122"/>
+                <a:cs typeface="Calibri" pitchFamily="34" charset="-120"/>
+              </a:rPr>
+              <a:t>Thomas Rathbun, PhD  ·  LOCKHEED MARTIN PROPRIETARY INFORMATION</a:t>
+            </a:r>
+            <a:endParaRPr lang="en-US" sz="1000" dirty="0"/>
+          </a:p>
+        </p:txBody>
+      </p:sp>
+      <p:sp>
+        <p:nvSpPr>
+          <p:cNvPr id="6" name="Text 4"/>
+          <p:cNvSpPr/>
+          <p:nvPr/>
+        </p:nvSpPr>
+        <p:spPr>
+          <a:xfrm>
             <a:off x="502920" y="1645920"/>
             <a:ext cx="8229600" cy="1051560"/>
           </a:xfrm>
@@ -2688,7 +2766,7 @@
       </p:sp>
       <p:sp>
         <p:nvSpPr>
-          <p:cNvPr id="5" name="Text 3"/>
+          <p:cNvPr id="7" name="Text 5"/>
           <p:cNvSpPr/>
           <p:nvPr/>
         </p:nvSpPr>
@@ -2744,7 +2822,7 @@
       </p:sp>
       <p:sp>
         <p:nvSpPr>
-          <p:cNvPr id="6" name="Text 4"/>
+          <p:cNvPr id="8" name="Text 6"/>
           <p:cNvSpPr/>
           <p:nvPr/>
         </p:nvSpPr>
@@ -2918,7 +2996,85 @@
       </p:sp>
       <p:sp>
         <p:nvSpPr>
-          <p:cNvPr id="5" name="Shape 3"/>
+          <p:cNvPr id="5" name="Text 3"/>
+          <p:cNvSpPr/>
+          <p:nvPr/>
+        </p:nvSpPr>
+        <p:spPr>
+          <a:xfrm>
+            <a:off x="411480" y="18288"/>
+            <a:ext cx="5852160" cy="146304"/>
+          </a:xfrm>
+          <a:prstGeom prst="rect">
+            <a:avLst/>
+          </a:prstGeom>
+          <a:noFill/>
+          <a:ln/>
+        </p:spPr>
+        <p:txBody>
+          <a:bodyPr wrap="square" lIns="0" tIns="0" rIns="0" bIns="0" rtlCol="0" anchor="ctr"/>
+          <a:lstStyle/>
+          <a:p>
+            <a:pPr indent="0" marL="0">
+              <a:buNone/>
+            </a:pPr>
+            <a:r>
+              <a:rPr lang="en-US" sz="800" b="1" dirty="0">
+                <a:solidFill>
+                  <a:srgbClr val="FECACA"/>
+                </a:solidFill>
+                <a:latin typeface="Calibri" pitchFamily="34" charset="0"/>
+                <a:ea typeface="Calibri" pitchFamily="34" charset="-122"/>
+                <a:cs typeface="Calibri" pitchFamily="34" charset="-120"/>
+              </a:rPr>
+              <a:t>LOCKHEED MARTIN PROPRIETARY INFORMATION</a:t>
+            </a:r>
+            <a:endParaRPr lang="en-US" sz="800" dirty="0"/>
+          </a:p>
+        </p:txBody>
+      </p:sp>
+      <p:sp>
+        <p:nvSpPr>
+          <p:cNvPr id="6" name="Text 4"/>
+          <p:cNvSpPr/>
+          <p:nvPr/>
+        </p:nvSpPr>
+        <p:spPr>
+          <a:xfrm>
+            <a:off x="411480" y="4919472"/>
+            <a:ext cx="7680960" cy="182880"/>
+          </a:xfrm>
+          <a:prstGeom prst="rect">
+            <a:avLst/>
+          </a:prstGeom>
+          <a:noFill/>
+          <a:ln/>
+        </p:spPr>
+        <p:txBody>
+          <a:bodyPr wrap="square" lIns="0" tIns="0" rIns="0" bIns="0" rtlCol="0" anchor="ctr"/>
+          <a:lstStyle/>
+          <a:p>
+            <a:pPr indent="0" marL="0">
+              <a:buNone/>
+            </a:pPr>
+            <a:r>
+              <a:rPr lang="en-US" sz="900" dirty="0">
+                <a:solidFill>
+                  <a:srgbClr val="94A3B8"/>
+                </a:solidFill>
+                <a:latin typeface="Calibri" pitchFamily="34" charset="0"/>
+                <a:ea typeface="Calibri" pitchFamily="34" charset="-122"/>
+                <a:cs typeface="Calibri" pitchFamily="34" charset="-120"/>
+              </a:rPr>
+              <a:t>Thomas Rathbun, PhD  ·  LOCKHEED MARTIN PROPRIETARY INFORMATION</a:t>
+            </a:r>
+            <a:endParaRPr lang="en-US" sz="900" dirty="0"/>
+          </a:p>
+        </p:txBody>
+      </p:sp>
+      <p:sp>
+        <p:nvSpPr>
+          <p:cNvPr id="7" name="Shape 5"/>
           <p:cNvSpPr/>
           <p:nvPr/>
         </p:nvSpPr>
@@ -2945,7 +3101,7 @@
       </p:sp>
       <p:sp>
         <p:nvSpPr>
-          <p:cNvPr id="6" name="Text 4"/>
+          <p:cNvPr id="8" name="Text 6"/>
           <p:cNvSpPr/>
           <p:nvPr/>
         </p:nvSpPr>
@@ -2984,7 +3140,7 @@
       </p:sp>
       <p:sp>
         <p:nvSpPr>
-          <p:cNvPr id="7" name="Text 5"/>
+          <p:cNvPr id="9" name="Text 7"/>
           <p:cNvSpPr/>
           <p:nvPr/>
         </p:nvSpPr>
@@ -3023,7 +3179,7 @@
       </p:sp>
       <p:sp>
         <p:nvSpPr>
-          <p:cNvPr id="8" name="Shape 6"/>
+          <p:cNvPr id="10" name="Shape 8"/>
           <p:cNvSpPr/>
           <p:nvPr/>
         </p:nvSpPr>
@@ -3050,7 +3206,7 @@
       </p:sp>
       <p:sp>
         <p:nvSpPr>
-          <p:cNvPr id="9" name="Shape 7"/>
+          <p:cNvPr id="11" name="Shape 9"/>
           <p:cNvSpPr/>
           <p:nvPr/>
         </p:nvSpPr>
@@ -3075,7 +3231,7 @@
       </p:sp>
       <p:sp>
         <p:nvSpPr>
-          <p:cNvPr id="10" name="Text 8"/>
+          <p:cNvPr id="12" name="Text 10"/>
           <p:cNvSpPr/>
           <p:nvPr/>
         </p:nvSpPr>
@@ -3114,7 +3270,7 @@
       </p:sp>
       <p:sp>
         <p:nvSpPr>
-          <p:cNvPr id="11" name="Text 9"/>
+          <p:cNvPr id="13" name="Text 11"/>
           <p:cNvSpPr/>
           <p:nvPr/>
         </p:nvSpPr>
@@ -3153,7 +3309,7 @@
       </p:sp>
       <p:sp>
         <p:nvSpPr>
-          <p:cNvPr id="12" name="Shape 10"/>
+          <p:cNvPr id="14" name="Shape 12"/>
           <p:cNvSpPr/>
           <p:nvPr/>
         </p:nvSpPr>
@@ -3180,7 +3336,7 @@
       </p:sp>
       <p:sp>
         <p:nvSpPr>
-          <p:cNvPr id="13" name="Shape 11"/>
+          <p:cNvPr id="15" name="Shape 13"/>
           <p:cNvSpPr/>
           <p:nvPr/>
         </p:nvSpPr>
@@ -3205,7 +3361,7 @@
       </p:sp>
       <p:sp>
         <p:nvSpPr>
-          <p:cNvPr id="14" name="Text 12"/>
+          <p:cNvPr id="16" name="Text 14"/>
           <p:cNvSpPr/>
           <p:nvPr/>
         </p:nvSpPr>
@@ -3244,7 +3400,7 @@
       </p:sp>
       <p:sp>
         <p:nvSpPr>
-          <p:cNvPr id="15" name="Text 13"/>
+          <p:cNvPr id="17" name="Text 15"/>
           <p:cNvSpPr/>
           <p:nvPr/>
         </p:nvSpPr>
@@ -3283,7 +3439,7 @@
       </p:sp>
       <p:sp>
         <p:nvSpPr>
-          <p:cNvPr id="16" name="Shape 14"/>
+          <p:cNvPr id="18" name="Shape 16"/>
           <p:cNvSpPr/>
           <p:nvPr/>
         </p:nvSpPr>
@@ -3310,7 +3466,7 @@
       </p:sp>
       <p:sp>
         <p:nvSpPr>
-          <p:cNvPr id="17" name="Shape 15"/>
+          <p:cNvPr id="19" name="Shape 17"/>
           <p:cNvSpPr/>
           <p:nvPr/>
         </p:nvSpPr>
@@ -3335,7 +3491,7 @@
       </p:sp>
       <p:sp>
         <p:nvSpPr>
-          <p:cNvPr id="18" name="Text 16"/>
+          <p:cNvPr id="20" name="Text 18"/>
           <p:cNvSpPr/>
           <p:nvPr/>
         </p:nvSpPr>
@@ -3374,7 +3530,7 @@
       </p:sp>
       <p:sp>
         <p:nvSpPr>
-          <p:cNvPr id="19" name="Text 17"/>
+          <p:cNvPr id="21" name="Text 19"/>
           <p:cNvSpPr/>
           <p:nvPr/>
         </p:nvSpPr>
@@ -3413,7 +3569,7 @@
       </p:sp>
       <p:sp>
         <p:nvSpPr>
-          <p:cNvPr id="20" name="Shape 18"/>
+          <p:cNvPr id="22" name="Shape 20"/>
           <p:cNvSpPr/>
           <p:nvPr/>
         </p:nvSpPr>
@@ -3440,7 +3596,7 @@
       </p:sp>
       <p:sp>
         <p:nvSpPr>
-          <p:cNvPr id="21" name="Shape 19"/>
+          <p:cNvPr id="23" name="Shape 21"/>
           <p:cNvSpPr/>
           <p:nvPr/>
         </p:nvSpPr>
@@ -3465,7 +3621,7 @@
       </p:sp>
       <p:sp>
         <p:nvSpPr>
-          <p:cNvPr id="22" name="Text 20"/>
+          <p:cNvPr id="24" name="Text 22"/>
           <p:cNvSpPr/>
           <p:nvPr/>
         </p:nvSpPr>
@@ -3504,7 +3660,7 @@
       </p:sp>
       <p:sp>
         <p:nvSpPr>
-          <p:cNvPr id="23" name="Text 21"/>
+          <p:cNvPr id="25" name="Text 23"/>
           <p:cNvSpPr/>
           <p:nvPr/>
         </p:nvSpPr>
@@ -3678,7 +3834,85 @@
       </p:sp>
       <p:sp>
         <p:nvSpPr>
-          <p:cNvPr id="5" name="Shape 3"/>
+          <p:cNvPr id="5" name="Text 3"/>
+          <p:cNvSpPr/>
+          <p:nvPr/>
+        </p:nvSpPr>
+        <p:spPr>
+          <a:xfrm>
+            <a:off x="411480" y="18288"/>
+            <a:ext cx="5852160" cy="146304"/>
+          </a:xfrm>
+          <a:prstGeom prst="rect">
+            <a:avLst/>
+          </a:prstGeom>
+          <a:noFill/>
+          <a:ln/>
+        </p:spPr>
+        <p:txBody>
+          <a:bodyPr wrap="square" lIns="0" tIns="0" rIns="0" bIns="0" rtlCol="0" anchor="ctr"/>
+          <a:lstStyle/>
+          <a:p>
+            <a:pPr indent="0" marL="0">
+              <a:buNone/>
+            </a:pPr>
+            <a:r>
+              <a:rPr lang="en-US" sz="800" b="1" dirty="0">
+                <a:solidFill>
+                  <a:srgbClr val="FECACA"/>
+                </a:solidFill>
+                <a:latin typeface="Calibri" pitchFamily="34" charset="0"/>
+                <a:ea typeface="Calibri" pitchFamily="34" charset="-122"/>
+                <a:cs typeface="Calibri" pitchFamily="34" charset="-120"/>
+              </a:rPr>
+              <a:t>LOCKHEED MARTIN PROPRIETARY INFORMATION</a:t>
+            </a:r>
+            <a:endParaRPr lang="en-US" sz="800" dirty="0"/>
+          </a:p>
+        </p:txBody>
+      </p:sp>
+      <p:sp>
+        <p:nvSpPr>
+          <p:cNvPr id="6" name="Text 4"/>
+          <p:cNvSpPr/>
+          <p:nvPr/>
+        </p:nvSpPr>
+        <p:spPr>
+          <a:xfrm>
+            <a:off x="411480" y="4919472"/>
+            <a:ext cx="7680960" cy="182880"/>
+          </a:xfrm>
+          <a:prstGeom prst="rect">
+            <a:avLst/>
+          </a:prstGeom>
+          <a:noFill/>
+          <a:ln/>
+        </p:spPr>
+        <p:txBody>
+          <a:bodyPr wrap="square" lIns="0" tIns="0" rIns="0" bIns="0" rtlCol="0" anchor="ctr"/>
+          <a:lstStyle/>
+          <a:p>
+            <a:pPr indent="0" marL="0">
+              <a:buNone/>
+            </a:pPr>
+            <a:r>
+              <a:rPr lang="en-US" sz="900" dirty="0">
+                <a:solidFill>
+                  <a:srgbClr val="94A3B8"/>
+                </a:solidFill>
+                <a:latin typeface="Calibri" pitchFamily="34" charset="0"/>
+                <a:ea typeface="Calibri" pitchFamily="34" charset="-122"/>
+                <a:cs typeface="Calibri" pitchFamily="34" charset="-120"/>
+              </a:rPr>
+              <a:t>Thomas Rathbun, PhD  ·  LOCKHEED MARTIN PROPRIETARY INFORMATION</a:t>
+            </a:r>
+            <a:endParaRPr lang="en-US" sz="900" dirty="0"/>
+          </a:p>
+        </p:txBody>
+      </p:sp>
+      <p:sp>
+        <p:nvSpPr>
+          <p:cNvPr id="7" name="Shape 5"/>
           <p:cNvSpPr/>
           <p:nvPr/>
         </p:nvSpPr>
@@ -3705,7 +3939,7 @@
       </p:sp>
       <p:sp>
         <p:nvSpPr>
-          <p:cNvPr id="6" name="Shape 4"/>
+          <p:cNvPr id="8" name="Shape 6"/>
           <p:cNvSpPr/>
           <p:nvPr/>
         </p:nvSpPr>
@@ -3730,7 +3964,7 @@
       </p:sp>
       <p:sp>
         <p:nvSpPr>
-          <p:cNvPr id="7" name="Text 5"/>
+          <p:cNvPr id="9" name="Text 7"/>
           <p:cNvSpPr/>
           <p:nvPr/>
         </p:nvSpPr>
@@ -3769,7 +4003,7 @@
       </p:sp>
       <p:sp>
         <p:nvSpPr>
-          <p:cNvPr id="8" name="Text 6"/>
+          <p:cNvPr id="10" name="Text 8"/>
           <p:cNvSpPr/>
           <p:nvPr/>
         </p:nvSpPr>
@@ -3808,7 +4042,7 @@
       </p:sp>
       <p:sp>
         <p:nvSpPr>
-          <p:cNvPr id="9" name="Text 7"/>
+          <p:cNvPr id="11" name="Text 9"/>
           <p:cNvSpPr/>
           <p:nvPr/>
         </p:nvSpPr>
@@ -3847,7 +4081,7 @@
       </p:sp>
       <p:sp>
         <p:nvSpPr>
-          <p:cNvPr id="10" name="Shape 8"/>
+          <p:cNvPr id="12" name="Shape 10"/>
           <p:cNvSpPr/>
           <p:nvPr/>
         </p:nvSpPr>
@@ -3874,7 +4108,7 @@
       </p:sp>
       <p:sp>
         <p:nvSpPr>
-          <p:cNvPr id="11" name="Shape 9"/>
+          <p:cNvPr id="13" name="Shape 11"/>
           <p:cNvSpPr/>
           <p:nvPr/>
         </p:nvSpPr>
@@ -3899,7 +4133,7 @@
       </p:sp>
       <p:sp>
         <p:nvSpPr>
-          <p:cNvPr id="12" name="Text 10"/>
+          <p:cNvPr id="14" name="Text 12"/>
           <p:cNvSpPr/>
           <p:nvPr/>
         </p:nvSpPr>
@@ -3938,7 +4172,7 @@
       </p:sp>
       <p:sp>
         <p:nvSpPr>
-          <p:cNvPr id="13" name="Text 11"/>
+          <p:cNvPr id="15" name="Text 13"/>
           <p:cNvSpPr/>
           <p:nvPr/>
         </p:nvSpPr>
@@ -3977,7 +4211,7 @@
       </p:sp>
       <p:sp>
         <p:nvSpPr>
-          <p:cNvPr id="14" name="Text 12"/>
+          <p:cNvPr id="16" name="Text 14"/>
           <p:cNvSpPr/>
           <p:nvPr/>
         </p:nvSpPr>
@@ -4016,7 +4250,7 @@
       </p:sp>
       <p:sp>
         <p:nvSpPr>
-          <p:cNvPr id="15" name="Shape 13"/>
+          <p:cNvPr id="17" name="Shape 15"/>
           <p:cNvSpPr/>
           <p:nvPr/>
         </p:nvSpPr>
@@ -4043,7 +4277,7 @@
       </p:sp>
       <p:sp>
         <p:nvSpPr>
-          <p:cNvPr id="16" name="Shape 14"/>
+          <p:cNvPr id="18" name="Shape 16"/>
           <p:cNvSpPr/>
           <p:nvPr/>
         </p:nvSpPr>
@@ -4068,7 +4302,7 @@
       </p:sp>
       <p:sp>
         <p:nvSpPr>
-          <p:cNvPr id="17" name="Text 15"/>
+          <p:cNvPr id="19" name="Text 17"/>
           <p:cNvSpPr/>
           <p:nvPr/>
         </p:nvSpPr>
@@ -4107,7 +4341,7 @@
       </p:sp>
       <p:sp>
         <p:nvSpPr>
-          <p:cNvPr id="18" name="Text 16"/>
+          <p:cNvPr id="20" name="Text 18"/>
           <p:cNvSpPr/>
           <p:nvPr/>
         </p:nvSpPr>
@@ -4146,7 +4380,7 @@
       </p:sp>
       <p:sp>
         <p:nvSpPr>
-          <p:cNvPr id="19" name="Text 17"/>
+          <p:cNvPr id="21" name="Text 19"/>
           <p:cNvSpPr/>
           <p:nvPr/>
         </p:nvSpPr>
@@ -4185,7 +4419,7 @@
       </p:sp>
       <p:sp>
         <p:nvSpPr>
-          <p:cNvPr id="20" name="Shape 18"/>
+          <p:cNvPr id="22" name="Shape 20"/>
           <p:cNvSpPr/>
           <p:nvPr/>
         </p:nvSpPr>
@@ -4212,7 +4446,7 @@
       </p:sp>
       <p:sp>
         <p:nvSpPr>
-          <p:cNvPr id="21" name="Shape 19"/>
+          <p:cNvPr id="23" name="Shape 21"/>
           <p:cNvSpPr/>
           <p:nvPr/>
         </p:nvSpPr>
@@ -4237,7 +4471,7 @@
       </p:sp>
       <p:sp>
         <p:nvSpPr>
-          <p:cNvPr id="22" name="Text 20"/>
+          <p:cNvPr id="24" name="Text 22"/>
           <p:cNvSpPr/>
           <p:nvPr/>
         </p:nvSpPr>
@@ -4276,7 +4510,7 @@
       </p:sp>
       <p:sp>
         <p:nvSpPr>
-          <p:cNvPr id="23" name="Text 21"/>
+          <p:cNvPr id="25" name="Text 23"/>
           <p:cNvSpPr/>
           <p:nvPr/>
         </p:nvSpPr>
@@ -4315,7 +4549,7 @@
       </p:sp>
       <p:sp>
         <p:nvSpPr>
-          <p:cNvPr id="24" name="Text 22"/>
+          <p:cNvPr id="26" name="Text 24"/>
           <p:cNvSpPr/>
           <p:nvPr/>
         </p:nvSpPr>
@@ -4354,7 +4588,7 @@
       </p:sp>
       <p:sp>
         <p:nvSpPr>
-          <p:cNvPr id="25" name="Shape 23"/>
+          <p:cNvPr id="27" name="Shape 25"/>
           <p:cNvSpPr/>
           <p:nvPr/>
         </p:nvSpPr>
@@ -4381,7 +4615,7 @@
       </p:sp>
       <p:sp>
         <p:nvSpPr>
-          <p:cNvPr id="26" name="Shape 24"/>
+          <p:cNvPr id="28" name="Shape 26"/>
           <p:cNvSpPr/>
           <p:nvPr/>
         </p:nvSpPr>
@@ -4406,7 +4640,7 @@
       </p:sp>
       <p:sp>
         <p:nvSpPr>
-          <p:cNvPr id="27" name="Text 25"/>
+          <p:cNvPr id="29" name="Text 27"/>
           <p:cNvSpPr/>
           <p:nvPr/>
         </p:nvSpPr>
@@ -4445,7 +4679,7 @@
       </p:sp>
       <p:sp>
         <p:nvSpPr>
-          <p:cNvPr id="28" name="Text 26"/>
+          <p:cNvPr id="30" name="Text 28"/>
           <p:cNvSpPr/>
           <p:nvPr/>
         </p:nvSpPr>
@@ -4484,7 +4718,7 @@
       </p:sp>
       <p:sp>
         <p:nvSpPr>
-          <p:cNvPr id="29" name="Text 27"/>
+          <p:cNvPr id="31" name="Text 29"/>
           <p:cNvSpPr/>
           <p:nvPr/>
         </p:nvSpPr>
@@ -4523,7 +4757,7 @@
       </p:sp>
       <p:sp>
         <p:nvSpPr>
-          <p:cNvPr id="30" name="Shape 28"/>
+          <p:cNvPr id="32" name="Shape 30"/>
           <p:cNvSpPr/>
           <p:nvPr/>
         </p:nvSpPr>
@@ -4550,7 +4784,7 @@
       </p:sp>
       <p:sp>
         <p:nvSpPr>
-          <p:cNvPr id="31" name="Text 29"/>
+          <p:cNvPr id="33" name="Text 31"/>
           <p:cNvSpPr/>
           <p:nvPr/>
         </p:nvSpPr>
@@ -4724,7 +4958,85 @@
       </p:sp>
       <p:sp>
         <p:nvSpPr>
-          <p:cNvPr id="5" name="Shape 3"/>
+          <p:cNvPr id="5" name="Text 3"/>
+          <p:cNvSpPr/>
+          <p:nvPr/>
+        </p:nvSpPr>
+        <p:spPr>
+          <a:xfrm>
+            <a:off x="411480" y="18288"/>
+            <a:ext cx="5852160" cy="146304"/>
+          </a:xfrm>
+          <a:prstGeom prst="rect">
+            <a:avLst/>
+          </a:prstGeom>
+          <a:noFill/>
+          <a:ln/>
+        </p:spPr>
+        <p:txBody>
+          <a:bodyPr wrap="square" lIns="0" tIns="0" rIns="0" bIns="0" rtlCol="0" anchor="ctr"/>
+          <a:lstStyle/>
+          <a:p>
+            <a:pPr indent="0" marL="0">
+              <a:buNone/>
+            </a:pPr>
+            <a:r>
+              <a:rPr lang="en-US" sz="800" b="1" dirty="0">
+                <a:solidFill>
+                  <a:srgbClr val="FECACA"/>
+                </a:solidFill>
+                <a:latin typeface="Calibri" pitchFamily="34" charset="0"/>
+                <a:ea typeface="Calibri" pitchFamily="34" charset="-122"/>
+                <a:cs typeface="Calibri" pitchFamily="34" charset="-120"/>
+              </a:rPr>
+              <a:t>LOCKHEED MARTIN PROPRIETARY INFORMATION</a:t>
+            </a:r>
+            <a:endParaRPr lang="en-US" sz="800" dirty="0"/>
+          </a:p>
+        </p:txBody>
+      </p:sp>
+      <p:sp>
+        <p:nvSpPr>
+          <p:cNvPr id="6" name="Text 4"/>
+          <p:cNvSpPr/>
+          <p:nvPr/>
+        </p:nvSpPr>
+        <p:spPr>
+          <a:xfrm>
+            <a:off x="411480" y="4919472"/>
+            <a:ext cx="7680960" cy="182880"/>
+          </a:xfrm>
+          <a:prstGeom prst="rect">
+            <a:avLst/>
+          </a:prstGeom>
+          <a:noFill/>
+          <a:ln/>
+        </p:spPr>
+        <p:txBody>
+          <a:bodyPr wrap="square" lIns="0" tIns="0" rIns="0" bIns="0" rtlCol="0" anchor="ctr"/>
+          <a:lstStyle/>
+          <a:p>
+            <a:pPr indent="0" marL="0">
+              <a:buNone/>
+            </a:pPr>
+            <a:r>
+              <a:rPr lang="en-US" sz="900" dirty="0">
+                <a:solidFill>
+                  <a:srgbClr val="94A3B8"/>
+                </a:solidFill>
+                <a:latin typeface="Calibri" pitchFamily="34" charset="0"/>
+                <a:ea typeface="Calibri" pitchFamily="34" charset="-122"/>
+                <a:cs typeface="Calibri" pitchFamily="34" charset="-120"/>
+              </a:rPr>
+              <a:t>Thomas Rathbun, PhD  ·  LOCKHEED MARTIN PROPRIETARY INFORMATION</a:t>
+            </a:r>
+            <a:endParaRPr lang="en-US" sz="900" dirty="0"/>
+          </a:p>
+        </p:txBody>
+      </p:sp>
+      <p:sp>
+        <p:nvSpPr>
+          <p:cNvPr id="7" name="Shape 5"/>
           <p:cNvSpPr/>
           <p:nvPr/>
         </p:nvSpPr>
@@ -4751,7 +5063,7 @@
       </p:sp>
       <p:sp>
         <p:nvSpPr>
-          <p:cNvPr id="6" name="Shape 4"/>
+          <p:cNvPr id="8" name="Shape 6"/>
           <p:cNvSpPr/>
           <p:nvPr/>
         </p:nvSpPr>
@@ -4778,7 +5090,7 @@
       </p:sp>
       <p:sp>
         <p:nvSpPr>
-          <p:cNvPr id="7" name="Text 5"/>
+          <p:cNvPr id="9" name="Text 7"/>
           <p:cNvSpPr/>
           <p:nvPr/>
         </p:nvSpPr>
@@ -4817,7 +5129,7 @@
       </p:sp>
       <p:sp>
         <p:nvSpPr>
-          <p:cNvPr id="8" name="Text 6"/>
+          <p:cNvPr id="10" name="Text 8"/>
           <p:cNvSpPr/>
           <p:nvPr/>
         </p:nvSpPr>
@@ -4856,7 +5168,7 @@
       </p:sp>
       <p:sp>
         <p:nvSpPr>
-          <p:cNvPr id="9" name="Text 7"/>
+          <p:cNvPr id="11" name="Text 9"/>
           <p:cNvSpPr/>
           <p:nvPr/>
         </p:nvSpPr>
@@ -4895,7 +5207,7 @@
       </p:sp>
       <p:sp>
         <p:nvSpPr>
-          <p:cNvPr id="10" name="Shape 8"/>
+          <p:cNvPr id="12" name="Shape 10"/>
           <p:cNvSpPr/>
           <p:nvPr/>
         </p:nvSpPr>
@@ -4922,7 +5234,7 @@
       </p:sp>
       <p:sp>
         <p:nvSpPr>
-          <p:cNvPr id="11" name="Shape 9"/>
+          <p:cNvPr id="13" name="Shape 11"/>
           <p:cNvSpPr/>
           <p:nvPr/>
         </p:nvSpPr>
@@ -4949,7 +5261,7 @@
       </p:sp>
       <p:sp>
         <p:nvSpPr>
-          <p:cNvPr id="12" name="Text 10"/>
+          <p:cNvPr id="14" name="Text 12"/>
           <p:cNvSpPr/>
           <p:nvPr/>
         </p:nvSpPr>
@@ -4988,7 +5300,7 @@
       </p:sp>
       <p:sp>
         <p:nvSpPr>
-          <p:cNvPr id="13" name="Text 11"/>
+          <p:cNvPr id="15" name="Text 13"/>
           <p:cNvSpPr/>
           <p:nvPr/>
         </p:nvSpPr>
@@ -5027,7 +5339,7 @@
       </p:sp>
       <p:sp>
         <p:nvSpPr>
-          <p:cNvPr id="14" name="Text 12"/>
+          <p:cNvPr id="16" name="Text 14"/>
           <p:cNvSpPr/>
           <p:nvPr/>
         </p:nvSpPr>
@@ -5066,7 +5378,7 @@
       </p:sp>
       <p:sp>
         <p:nvSpPr>
-          <p:cNvPr id="15" name="Shape 13"/>
+          <p:cNvPr id="17" name="Shape 15"/>
           <p:cNvSpPr/>
           <p:nvPr/>
         </p:nvSpPr>
@@ -5093,7 +5405,7 @@
       </p:sp>
       <p:sp>
         <p:nvSpPr>
-          <p:cNvPr id="16" name="Shape 14"/>
+          <p:cNvPr id="18" name="Shape 16"/>
           <p:cNvSpPr/>
           <p:nvPr/>
         </p:nvSpPr>
@@ -5120,7 +5432,7 @@
       </p:sp>
       <p:sp>
         <p:nvSpPr>
-          <p:cNvPr id="17" name="Text 15"/>
+          <p:cNvPr id="19" name="Text 17"/>
           <p:cNvSpPr/>
           <p:nvPr/>
         </p:nvSpPr>
@@ -5159,7 +5471,7 @@
       </p:sp>
       <p:sp>
         <p:nvSpPr>
-          <p:cNvPr id="18" name="Text 16"/>
+          <p:cNvPr id="20" name="Text 18"/>
           <p:cNvSpPr/>
           <p:nvPr/>
         </p:nvSpPr>
@@ -5198,7 +5510,7 @@
       </p:sp>
       <p:sp>
         <p:nvSpPr>
-          <p:cNvPr id="19" name="Text 17"/>
+          <p:cNvPr id="21" name="Text 19"/>
           <p:cNvSpPr/>
           <p:nvPr/>
         </p:nvSpPr>
@@ -5237,7 +5549,7 @@
       </p:sp>
       <p:sp>
         <p:nvSpPr>
-          <p:cNvPr id="20" name="Shape 18"/>
+          <p:cNvPr id="22" name="Shape 20"/>
           <p:cNvSpPr/>
           <p:nvPr/>
         </p:nvSpPr>
@@ -5264,7 +5576,7 @@
       </p:sp>
       <p:sp>
         <p:nvSpPr>
-          <p:cNvPr id="21" name="Shape 19"/>
+          <p:cNvPr id="23" name="Shape 21"/>
           <p:cNvSpPr/>
           <p:nvPr/>
         </p:nvSpPr>
@@ -5291,7 +5603,7 @@
       </p:sp>
       <p:sp>
         <p:nvSpPr>
-          <p:cNvPr id="22" name="Text 20"/>
+          <p:cNvPr id="24" name="Text 22"/>
           <p:cNvSpPr/>
           <p:nvPr/>
         </p:nvSpPr>
@@ -5330,7 +5642,7 @@
       </p:sp>
       <p:sp>
         <p:nvSpPr>
-          <p:cNvPr id="23" name="Text 21"/>
+          <p:cNvPr id="25" name="Text 23"/>
           <p:cNvSpPr/>
           <p:nvPr/>
         </p:nvSpPr>
@@ -5369,7 +5681,7 @@
       </p:sp>
       <p:sp>
         <p:nvSpPr>
-          <p:cNvPr id="24" name="Text 22"/>
+          <p:cNvPr id="26" name="Text 24"/>
           <p:cNvSpPr/>
           <p:nvPr/>
         </p:nvSpPr>
@@ -5543,7 +5855,85 @@
       </p:sp>
       <p:sp>
         <p:nvSpPr>
-          <p:cNvPr id="5" name="Shape 3"/>
+          <p:cNvPr id="5" name="Text 3"/>
+          <p:cNvSpPr/>
+          <p:nvPr/>
+        </p:nvSpPr>
+        <p:spPr>
+          <a:xfrm>
+            <a:off x="411480" y="18288"/>
+            <a:ext cx="5852160" cy="146304"/>
+          </a:xfrm>
+          <a:prstGeom prst="rect">
+            <a:avLst/>
+          </a:prstGeom>
+          <a:noFill/>
+          <a:ln/>
+        </p:spPr>
+        <p:txBody>
+          <a:bodyPr wrap="square" lIns="0" tIns="0" rIns="0" bIns="0" rtlCol="0" anchor="ctr"/>
+          <a:lstStyle/>
+          <a:p>
+            <a:pPr indent="0" marL="0">
+              <a:buNone/>
+            </a:pPr>
+            <a:r>
+              <a:rPr lang="en-US" sz="800" b="1" dirty="0">
+                <a:solidFill>
+                  <a:srgbClr val="FECACA"/>
+                </a:solidFill>
+                <a:latin typeface="Calibri" pitchFamily="34" charset="0"/>
+                <a:ea typeface="Calibri" pitchFamily="34" charset="-122"/>
+                <a:cs typeface="Calibri" pitchFamily="34" charset="-120"/>
+              </a:rPr>
+              <a:t>LOCKHEED MARTIN PROPRIETARY INFORMATION</a:t>
+            </a:r>
+            <a:endParaRPr lang="en-US" sz="800" dirty="0"/>
+          </a:p>
+        </p:txBody>
+      </p:sp>
+      <p:sp>
+        <p:nvSpPr>
+          <p:cNvPr id="6" name="Text 4"/>
+          <p:cNvSpPr/>
+          <p:nvPr/>
+        </p:nvSpPr>
+        <p:spPr>
+          <a:xfrm>
+            <a:off x="411480" y="4919472"/>
+            <a:ext cx="7680960" cy="182880"/>
+          </a:xfrm>
+          <a:prstGeom prst="rect">
+            <a:avLst/>
+          </a:prstGeom>
+          <a:noFill/>
+          <a:ln/>
+        </p:spPr>
+        <p:txBody>
+          <a:bodyPr wrap="square" lIns="0" tIns="0" rIns="0" bIns="0" rtlCol="0" anchor="ctr"/>
+          <a:lstStyle/>
+          <a:p>
+            <a:pPr indent="0" marL="0">
+              <a:buNone/>
+            </a:pPr>
+            <a:r>
+              <a:rPr lang="en-US" sz="900" dirty="0">
+                <a:solidFill>
+                  <a:srgbClr val="94A3B8"/>
+                </a:solidFill>
+                <a:latin typeface="Calibri" pitchFamily="34" charset="0"/>
+                <a:ea typeface="Calibri" pitchFamily="34" charset="-122"/>
+                <a:cs typeface="Calibri" pitchFamily="34" charset="-120"/>
+              </a:rPr>
+              <a:t>Thomas Rathbun, PhD  ·  LOCKHEED MARTIN PROPRIETARY INFORMATION</a:t>
+            </a:r>
+            <a:endParaRPr lang="en-US" sz="900" dirty="0"/>
+          </a:p>
+        </p:txBody>
+      </p:sp>
+      <p:sp>
+        <p:nvSpPr>
+          <p:cNvPr id="7" name="Shape 5"/>
           <p:cNvSpPr/>
           <p:nvPr/>
         </p:nvSpPr>
@@ -5570,7 +5960,7 @@
       </p:sp>
       <p:sp>
         <p:nvSpPr>
-          <p:cNvPr id="6" name="Shape 4"/>
+          <p:cNvPr id="8" name="Shape 6"/>
           <p:cNvSpPr/>
           <p:nvPr/>
         </p:nvSpPr>
@@ -5595,7 +5985,7 @@
       </p:sp>
       <p:sp>
         <p:nvSpPr>
-          <p:cNvPr id="7" name="Text 5"/>
+          <p:cNvPr id="9" name="Text 7"/>
           <p:cNvSpPr/>
           <p:nvPr/>
         </p:nvSpPr>
@@ -5634,7 +6024,7 @@
       </p:sp>
       <p:sp>
         <p:nvSpPr>
-          <p:cNvPr id="8" name="Text 6"/>
+          <p:cNvPr id="10" name="Text 8"/>
           <p:cNvSpPr/>
           <p:nvPr/>
         </p:nvSpPr>
@@ -5673,7 +6063,7 @@
       </p:sp>
       <p:sp>
         <p:nvSpPr>
-          <p:cNvPr id="9" name="Text 7"/>
+          <p:cNvPr id="11" name="Text 9"/>
           <p:cNvSpPr/>
           <p:nvPr/>
         </p:nvSpPr>
@@ -5712,7 +6102,7 @@
       </p:sp>
       <p:sp>
         <p:nvSpPr>
-          <p:cNvPr id="10" name="Text 8"/>
+          <p:cNvPr id="12" name="Text 10"/>
           <p:cNvSpPr/>
           <p:nvPr/>
         </p:nvSpPr>
@@ -5751,7 +6141,7 @@
       </p:sp>
       <p:sp>
         <p:nvSpPr>
-          <p:cNvPr id="11" name="Text 9"/>
+          <p:cNvPr id="13" name="Text 11"/>
           <p:cNvSpPr/>
           <p:nvPr/>
         </p:nvSpPr>
@@ -5790,7 +6180,7 @@
       </p:sp>
       <p:sp>
         <p:nvSpPr>
-          <p:cNvPr id="12" name="Text 10"/>
+          <p:cNvPr id="14" name="Text 12"/>
           <p:cNvSpPr/>
           <p:nvPr/>
         </p:nvSpPr>
@@ -5829,7 +6219,7 @@
       </p:sp>
       <p:sp>
         <p:nvSpPr>
-          <p:cNvPr id="13" name="Text 11"/>
+          <p:cNvPr id="15" name="Text 13"/>
           <p:cNvSpPr/>
           <p:nvPr/>
         </p:nvSpPr>
@@ -5868,7 +6258,7 @@
       </p:sp>
       <p:sp>
         <p:nvSpPr>
-          <p:cNvPr id="14" name="Text 12"/>
+          <p:cNvPr id="16" name="Text 14"/>
           <p:cNvSpPr/>
           <p:nvPr/>
         </p:nvSpPr>
@@ -5907,7 +6297,7 @@
       </p:sp>
       <p:sp>
         <p:nvSpPr>
-          <p:cNvPr id="15" name="Text 13"/>
+          <p:cNvPr id="17" name="Text 15"/>
           <p:cNvSpPr/>
           <p:nvPr/>
         </p:nvSpPr>
@@ -5946,7 +6336,7 @@
       </p:sp>
       <p:sp>
         <p:nvSpPr>
-          <p:cNvPr id="16" name="Text 14"/>
+          <p:cNvPr id="18" name="Text 16"/>
           <p:cNvSpPr/>
           <p:nvPr/>
         </p:nvSpPr>
@@ -5985,7 +6375,7 @@
       </p:sp>
       <p:sp>
         <p:nvSpPr>
-          <p:cNvPr id="17" name="Text 15"/>
+          <p:cNvPr id="19" name="Text 17"/>
           <p:cNvSpPr/>
           <p:nvPr/>
         </p:nvSpPr>
@@ -6024,7 +6414,7 @@
       </p:sp>
       <p:sp>
         <p:nvSpPr>
-          <p:cNvPr id="18" name="Shape 16"/>
+          <p:cNvPr id="20" name="Shape 18"/>
           <p:cNvSpPr/>
           <p:nvPr/>
         </p:nvSpPr>
@@ -6051,7 +6441,7 @@
       </p:sp>
       <p:sp>
         <p:nvSpPr>
-          <p:cNvPr id="19" name="Shape 17"/>
+          <p:cNvPr id="21" name="Shape 19"/>
           <p:cNvSpPr/>
           <p:nvPr/>
         </p:nvSpPr>
@@ -6076,7 +6466,7 @@
       </p:sp>
       <p:sp>
         <p:nvSpPr>
-          <p:cNvPr id="20" name="Text 18"/>
+          <p:cNvPr id="22" name="Text 20"/>
           <p:cNvSpPr/>
           <p:nvPr/>
         </p:nvSpPr>
@@ -6115,7 +6505,7 @@
       </p:sp>
       <p:sp>
         <p:nvSpPr>
-          <p:cNvPr id="21" name="Text 19"/>
+          <p:cNvPr id="23" name="Text 21"/>
           <p:cNvSpPr/>
           <p:nvPr/>
         </p:nvSpPr>
@@ -6154,7 +6544,7 @@
       </p:sp>
       <p:sp>
         <p:nvSpPr>
-          <p:cNvPr id="22" name="Text 20"/>
+          <p:cNvPr id="24" name="Text 22"/>
           <p:cNvSpPr/>
           <p:nvPr/>
         </p:nvSpPr>
@@ -6328,7 +6718,85 @@
       </p:sp>
       <p:sp>
         <p:nvSpPr>
-          <p:cNvPr id="5" name="Shape 3"/>
+          <p:cNvPr id="5" name="Text 3"/>
+          <p:cNvSpPr/>
+          <p:nvPr/>
+        </p:nvSpPr>
+        <p:spPr>
+          <a:xfrm>
+            <a:off x="411480" y="18288"/>
+            <a:ext cx="5852160" cy="146304"/>
+          </a:xfrm>
+          <a:prstGeom prst="rect">
+            <a:avLst/>
+          </a:prstGeom>
+          <a:noFill/>
+          <a:ln/>
+        </p:spPr>
+        <p:txBody>
+          <a:bodyPr wrap="square" lIns="0" tIns="0" rIns="0" bIns="0" rtlCol="0" anchor="ctr"/>
+          <a:lstStyle/>
+          <a:p>
+            <a:pPr indent="0" marL="0">
+              <a:buNone/>
+            </a:pPr>
+            <a:r>
+              <a:rPr lang="en-US" sz="800" b="1" dirty="0">
+                <a:solidFill>
+                  <a:srgbClr val="FECACA"/>
+                </a:solidFill>
+                <a:latin typeface="Calibri" pitchFamily="34" charset="0"/>
+                <a:ea typeface="Calibri" pitchFamily="34" charset="-122"/>
+                <a:cs typeface="Calibri" pitchFamily="34" charset="-120"/>
+              </a:rPr>
+              <a:t>LOCKHEED MARTIN PROPRIETARY INFORMATION</a:t>
+            </a:r>
+            <a:endParaRPr lang="en-US" sz="800" dirty="0"/>
+          </a:p>
+        </p:txBody>
+      </p:sp>
+      <p:sp>
+        <p:nvSpPr>
+          <p:cNvPr id="6" name="Text 4"/>
+          <p:cNvSpPr/>
+          <p:nvPr/>
+        </p:nvSpPr>
+        <p:spPr>
+          <a:xfrm>
+            <a:off x="411480" y="4919472"/>
+            <a:ext cx="7680960" cy="182880"/>
+          </a:xfrm>
+          <a:prstGeom prst="rect">
+            <a:avLst/>
+          </a:prstGeom>
+          <a:noFill/>
+          <a:ln/>
+        </p:spPr>
+        <p:txBody>
+          <a:bodyPr wrap="square" lIns="0" tIns="0" rIns="0" bIns="0" rtlCol="0" anchor="ctr"/>
+          <a:lstStyle/>
+          <a:p>
+            <a:pPr indent="0" marL="0">
+              <a:buNone/>
+            </a:pPr>
+            <a:r>
+              <a:rPr lang="en-US" sz="900" dirty="0">
+                <a:solidFill>
+                  <a:srgbClr val="94A3B8"/>
+                </a:solidFill>
+                <a:latin typeface="Calibri" pitchFamily="34" charset="0"/>
+                <a:ea typeface="Calibri" pitchFamily="34" charset="-122"/>
+                <a:cs typeface="Calibri" pitchFamily="34" charset="-120"/>
+              </a:rPr>
+              <a:t>Thomas Rathbun, PhD  ·  LOCKHEED MARTIN PROPRIETARY INFORMATION</a:t>
+            </a:r>
+            <a:endParaRPr lang="en-US" sz="900" dirty="0"/>
+          </a:p>
+        </p:txBody>
+      </p:sp>
+      <p:sp>
+        <p:nvSpPr>
+          <p:cNvPr id="7" name="Shape 5"/>
           <p:cNvSpPr/>
           <p:nvPr/>
         </p:nvSpPr>
@@ -6355,7 +6823,7 @@
       </p:sp>
       <p:sp>
         <p:nvSpPr>
-          <p:cNvPr id="6" name="Text 4"/>
+          <p:cNvPr id="8" name="Text 6"/>
           <p:cNvSpPr/>
           <p:nvPr/>
         </p:nvSpPr>
@@ -6394,7 +6862,7 @@
       </p:sp>
       <p:sp>
         <p:nvSpPr>
-          <p:cNvPr id="7" name="Shape 5"/>
+          <p:cNvPr id="9" name="Shape 7"/>
           <p:cNvSpPr/>
           <p:nvPr/>
         </p:nvSpPr>
@@ -6421,7 +6889,7 @@
       </p:sp>
       <p:sp>
         <p:nvSpPr>
-          <p:cNvPr id="8" name="Text 6"/>
+          <p:cNvPr id="10" name="Text 8"/>
           <p:cNvSpPr/>
           <p:nvPr/>
         </p:nvSpPr>
@@ -6460,7 +6928,7 @@
       </p:sp>
       <p:sp>
         <p:nvSpPr>
-          <p:cNvPr id="9" name="Shape 7"/>
+          <p:cNvPr id="11" name="Shape 9"/>
           <p:cNvSpPr/>
           <p:nvPr/>
         </p:nvSpPr>
@@ -6487,7 +6955,7 @@
       </p:sp>
       <p:sp>
         <p:nvSpPr>
-          <p:cNvPr id="10" name="Text 8"/>
+          <p:cNvPr id="12" name="Text 10"/>
           <p:cNvSpPr/>
           <p:nvPr/>
         </p:nvSpPr>
@@ -6526,7 +6994,7 @@
       </p:sp>
       <p:sp>
         <p:nvSpPr>
-          <p:cNvPr id="11" name="Shape 9"/>
+          <p:cNvPr id="13" name="Shape 11"/>
           <p:cNvSpPr/>
           <p:nvPr/>
         </p:nvSpPr>
@@ -6553,7 +7021,7 @@
       </p:sp>
       <p:sp>
         <p:nvSpPr>
-          <p:cNvPr id="12" name="Shape 10"/>
+          <p:cNvPr id="14" name="Shape 12"/>
           <p:cNvSpPr/>
           <p:nvPr/>
         </p:nvSpPr>
@@ -6580,7 +7048,7 @@
       </p:sp>
       <p:sp>
         <p:nvSpPr>
-          <p:cNvPr id="13" name="Shape 11"/>
+          <p:cNvPr id="15" name="Shape 13"/>
           <p:cNvSpPr/>
           <p:nvPr/>
         </p:nvSpPr>
@@ -6607,7 +7075,7 @@
       </p:sp>
       <p:sp>
         <p:nvSpPr>
-          <p:cNvPr id="14" name="Text 12"/>
+          <p:cNvPr id="16" name="Text 14"/>
           <p:cNvSpPr/>
           <p:nvPr/>
         </p:nvSpPr>
@@ -6646,7 +7114,7 @@
       </p:sp>
       <p:sp>
         <p:nvSpPr>
-          <p:cNvPr id="15" name="Text 13"/>
+          <p:cNvPr id="17" name="Text 15"/>
           <p:cNvSpPr/>
           <p:nvPr/>
         </p:nvSpPr>
@@ -6685,7 +7153,7 @@
       </p:sp>
       <p:sp>
         <p:nvSpPr>
-          <p:cNvPr id="16" name="Text 14"/>
+          <p:cNvPr id="18" name="Text 16"/>
           <p:cNvSpPr/>
           <p:nvPr/>
         </p:nvSpPr>
@@ -6724,7 +7192,7 @@
       </p:sp>
       <p:sp>
         <p:nvSpPr>
-          <p:cNvPr id="17" name="Shape 15"/>
+          <p:cNvPr id="19" name="Shape 17"/>
           <p:cNvSpPr/>
           <p:nvPr/>
         </p:nvSpPr>
@@ -6751,7 +7219,7 @@
       </p:sp>
       <p:sp>
         <p:nvSpPr>
-          <p:cNvPr id="18" name="Shape 16"/>
+          <p:cNvPr id="20" name="Shape 18"/>
           <p:cNvSpPr/>
           <p:nvPr/>
         </p:nvSpPr>
@@ -6778,7 +7246,7 @@
       </p:sp>
       <p:sp>
         <p:nvSpPr>
-          <p:cNvPr id="19" name="Shape 17"/>
+          <p:cNvPr id="21" name="Shape 19"/>
           <p:cNvSpPr/>
           <p:nvPr/>
         </p:nvSpPr>
@@ -6805,7 +7273,7 @@
       </p:sp>
       <p:sp>
         <p:nvSpPr>
-          <p:cNvPr id="20" name="Text 18"/>
+          <p:cNvPr id="22" name="Text 20"/>
           <p:cNvSpPr/>
           <p:nvPr/>
         </p:nvSpPr>
@@ -6844,7 +7312,7 @@
       </p:sp>
       <p:sp>
         <p:nvSpPr>
-          <p:cNvPr id="21" name="Text 19"/>
+          <p:cNvPr id="23" name="Text 21"/>
           <p:cNvSpPr/>
           <p:nvPr/>
         </p:nvSpPr>
@@ -6883,7 +7351,7 @@
       </p:sp>
       <p:sp>
         <p:nvSpPr>
-          <p:cNvPr id="22" name="Text 20"/>
+          <p:cNvPr id="24" name="Text 22"/>
           <p:cNvSpPr/>
           <p:nvPr/>
         </p:nvSpPr>
@@ -6922,7 +7390,7 @@
       </p:sp>
       <p:sp>
         <p:nvSpPr>
-          <p:cNvPr id="23" name="Shape 21"/>
+          <p:cNvPr id="25" name="Shape 23"/>
           <p:cNvSpPr/>
           <p:nvPr/>
         </p:nvSpPr>
@@ -6949,7 +7417,7 @@
       </p:sp>
       <p:sp>
         <p:nvSpPr>
-          <p:cNvPr id="24" name="Shape 22"/>
+          <p:cNvPr id="26" name="Shape 24"/>
           <p:cNvSpPr/>
           <p:nvPr/>
         </p:nvSpPr>
@@ -6976,7 +7444,7 @@
       </p:sp>
       <p:sp>
         <p:nvSpPr>
-          <p:cNvPr id="25" name="Shape 23"/>
+          <p:cNvPr id="27" name="Shape 25"/>
           <p:cNvSpPr/>
           <p:nvPr/>
         </p:nvSpPr>
@@ -7003,7 +7471,7 @@
       </p:sp>
       <p:sp>
         <p:nvSpPr>
-          <p:cNvPr id="26" name="Text 24"/>
+          <p:cNvPr id="28" name="Text 26"/>
           <p:cNvSpPr/>
           <p:nvPr/>
         </p:nvSpPr>
@@ -7042,7 +7510,7 @@
       </p:sp>
       <p:sp>
         <p:nvSpPr>
-          <p:cNvPr id="27" name="Text 25"/>
+          <p:cNvPr id="29" name="Text 27"/>
           <p:cNvSpPr/>
           <p:nvPr/>
         </p:nvSpPr>
@@ -7081,7 +7549,7 @@
       </p:sp>
       <p:sp>
         <p:nvSpPr>
-          <p:cNvPr id="28" name="Text 26"/>
+          <p:cNvPr id="30" name="Text 28"/>
           <p:cNvSpPr/>
           <p:nvPr/>
         </p:nvSpPr>
@@ -7120,7 +7588,7 @@
       </p:sp>
       <p:sp>
         <p:nvSpPr>
-          <p:cNvPr id="29" name="Shape 27"/>
+          <p:cNvPr id="31" name="Shape 29"/>
           <p:cNvSpPr/>
           <p:nvPr/>
         </p:nvSpPr>
@@ -7147,7 +7615,7 @@
       </p:sp>
       <p:sp>
         <p:nvSpPr>
-          <p:cNvPr id="30" name="Shape 28"/>
+          <p:cNvPr id="32" name="Shape 30"/>
           <p:cNvSpPr/>
           <p:nvPr/>
         </p:nvSpPr>
@@ -7174,7 +7642,7 @@
       </p:sp>
       <p:sp>
         <p:nvSpPr>
-          <p:cNvPr id="31" name="Shape 29"/>
+          <p:cNvPr id="33" name="Shape 31"/>
           <p:cNvSpPr/>
           <p:nvPr/>
         </p:nvSpPr>
@@ -7201,7 +7669,7 @@
       </p:sp>
       <p:sp>
         <p:nvSpPr>
-          <p:cNvPr id="32" name="Text 30"/>
+          <p:cNvPr id="34" name="Text 32"/>
           <p:cNvSpPr/>
           <p:nvPr/>
         </p:nvSpPr>
@@ -7240,7 +7708,7 @@
       </p:sp>
       <p:sp>
         <p:nvSpPr>
-          <p:cNvPr id="33" name="Text 31"/>
+          <p:cNvPr id="35" name="Text 33"/>
           <p:cNvSpPr/>
           <p:nvPr/>
         </p:nvSpPr>
@@ -7279,7 +7747,7 @@
       </p:sp>
       <p:sp>
         <p:nvSpPr>
-          <p:cNvPr id="34" name="Text 32"/>
+          <p:cNvPr id="36" name="Text 34"/>
           <p:cNvSpPr/>
           <p:nvPr/>
         </p:nvSpPr>
@@ -7318,7 +7786,7 @@
       </p:sp>
       <p:sp>
         <p:nvSpPr>
-          <p:cNvPr id="35" name="Shape 33"/>
+          <p:cNvPr id="37" name="Shape 35"/>
           <p:cNvSpPr/>
           <p:nvPr/>
         </p:nvSpPr>
@@ -7345,7 +7813,7 @@
       </p:sp>
       <p:sp>
         <p:nvSpPr>
-          <p:cNvPr id="36" name="Shape 34"/>
+          <p:cNvPr id="38" name="Shape 36"/>
           <p:cNvSpPr/>
           <p:nvPr/>
         </p:nvSpPr>
@@ -7372,7 +7840,7 @@
       </p:sp>
       <p:sp>
         <p:nvSpPr>
-          <p:cNvPr id="37" name="Shape 35"/>
+          <p:cNvPr id="39" name="Shape 37"/>
           <p:cNvSpPr/>
           <p:nvPr/>
         </p:nvSpPr>
@@ -7399,7 +7867,7 @@
       </p:sp>
       <p:sp>
         <p:nvSpPr>
-          <p:cNvPr id="38" name="Text 36"/>
+          <p:cNvPr id="40" name="Text 38"/>
           <p:cNvSpPr/>
           <p:nvPr/>
         </p:nvSpPr>
@@ -7438,7 +7906,7 @@
       </p:sp>
       <p:sp>
         <p:nvSpPr>
-          <p:cNvPr id="39" name="Text 37"/>
+          <p:cNvPr id="41" name="Text 39"/>
           <p:cNvSpPr/>
           <p:nvPr/>
         </p:nvSpPr>
@@ -7477,7 +7945,7 @@
       </p:sp>
       <p:sp>
         <p:nvSpPr>
-          <p:cNvPr id="40" name="Text 38"/>
+          <p:cNvPr id="42" name="Text 40"/>
           <p:cNvSpPr/>
           <p:nvPr/>
         </p:nvSpPr>
@@ -7516,7 +7984,7 @@
       </p:sp>
       <p:sp>
         <p:nvSpPr>
-          <p:cNvPr id="41" name="Shape 39"/>
+          <p:cNvPr id="43" name="Shape 41"/>
           <p:cNvSpPr/>
           <p:nvPr/>
         </p:nvSpPr>
@@ -7543,7 +8011,7 @@
       </p:sp>
       <p:sp>
         <p:nvSpPr>
-          <p:cNvPr id="42" name="Shape 40"/>
+          <p:cNvPr id="44" name="Shape 42"/>
           <p:cNvSpPr/>
           <p:nvPr/>
         </p:nvSpPr>
@@ -7570,7 +8038,7 @@
       </p:sp>
       <p:sp>
         <p:nvSpPr>
-          <p:cNvPr id="43" name="Shape 41"/>
+          <p:cNvPr id="45" name="Shape 43"/>
           <p:cNvSpPr/>
           <p:nvPr/>
         </p:nvSpPr>
@@ -7597,7 +8065,7 @@
       </p:sp>
       <p:sp>
         <p:nvSpPr>
-          <p:cNvPr id="44" name="Text 42"/>
+          <p:cNvPr id="46" name="Text 44"/>
           <p:cNvSpPr/>
           <p:nvPr/>
         </p:nvSpPr>
@@ -7636,7 +8104,7 @@
       </p:sp>
       <p:sp>
         <p:nvSpPr>
-          <p:cNvPr id="45" name="Text 43"/>
+          <p:cNvPr id="47" name="Text 45"/>
           <p:cNvSpPr/>
           <p:nvPr/>
         </p:nvSpPr>
@@ -7675,7 +8143,7 @@
       </p:sp>
       <p:sp>
         <p:nvSpPr>
-          <p:cNvPr id="46" name="Text 44"/>
+          <p:cNvPr id="48" name="Text 46"/>
           <p:cNvSpPr/>
           <p:nvPr/>
         </p:nvSpPr>
@@ -7849,7 +8317,85 @@
       </p:sp>
       <p:sp>
         <p:nvSpPr>
-          <p:cNvPr id="5" name="Shape 3"/>
+          <p:cNvPr id="5" name="Text 3"/>
+          <p:cNvSpPr/>
+          <p:nvPr/>
+        </p:nvSpPr>
+        <p:spPr>
+          <a:xfrm>
+            <a:off x="411480" y="18288"/>
+            <a:ext cx="5852160" cy="146304"/>
+          </a:xfrm>
+          <a:prstGeom prst="rect">
+            <a:avLst/>
+          </a:prstGeom>
+          <a:noFill/>
+          <a:ln/>
+        </p:spPr>
+        <p:txBody>
+          <a:bodyPr wrap="square" lIns="0" tIns="0" rIns="0" bIns="0" rtlCol="0" anchor="ctr"/>
+          <a:lstStyle/>
+          <a:p>
+            <a:pPr indent="0" marL="0">
+              <a:buNone/>
+            </a:pPr>
+            <a:r>
+              <a:rPr lang="en-US" sz="800" b="1" dirty="0">
+                <a:solidFill>
+                  <a:srgbClr val="FECACA"/>
+                </a:solidFill>
+                <a:latin typeface="Calibri" pitchFamily="34" charset="0"/>
+                <a:ea typeface="Calibri" pitchFamily="34" charset="-122"/>
+                <a:cs typeface="Calibri" pitchFamily="34" charset="-120"/>
+              </a:rPr>
+              <a:t>LOCKHEED MARTIN PROPRIETARY INFORMATION</a:t>
+            </a:r>
+            <a:endParaRPr lang="en-US" sz="800" dirty="0"/>
+          </a:p>
+        </p:txBody>
+      </p:sp>
+      <p:sp>
+        <p:nvSpPr>
+          <p:cNvPr id="6" name="Text 4"/>
+          <p:cNvSpPr/>
+          <p:nvPr/>
+        </p:nvSpPr>
+        <p:spPr>
+          <a:xfrm>
+            <a:off x="411480" y="4919472"/>
+            <a:ext cx="7680960" cy="182880"/>
+          </a:xfrm>
+          <a:prstGeom prst="rect">
+            <a:avLst/>
+          </a:prstGeom>
+          <a:noFill/>
+          <a:ln/>
+        </p:spPr>
+        <p:txBody>
+          <a:bodyPr wrap="square" lIns="0" tIns="0" rIns="0" bIns="0" rtlCol="0" anchor="ctr"/>
+          <a:lstStyle/>
+          <a:p>
+            <a:pPr indent="0" marL="0">
+              <a:buNone/>
+            </a:pPr>
+            <a:r>
+              <a:rPr lang="en-US" sz="900" dirty="0">
+                <a:solidFill>
+                  <a:srgbClr val="94A3B8"/>
+                </a:solidFill>
+                <a:latin typeface="Calibri" pitchFamily="34" charset="0"/>
+                <a:ea typeface="Calibri" pitchFamily="34" charset="-122"/>
+                <a:cs typeface="Calibri" pitchFamily="34" charset="-120"/>
+              </a:rPr>
+              <a:t>Thomas Rathbun, PhD  ·  LOCKHEED MARTIN PROPRIETARY INFORMATION</a:t>
+            </a:r>
+            <a:endParaRPr lang="en-US" sz="900" dirty="0"/>
+          </a:p>
+        </p:txBody>
+      </p:sp>
+      <p:sp>
+        <p:nvSpPr>
+          <p:cNvPr id="7" name="Shape 5"/>
           <p:cNvSpPr/>
           <p:nvPr/>
         </p:nvSpPr>
@@ -7876,7 +8422,7 @@
       </p:sp>
       <p:sp>
         <p:nvSpPr>
-          <p:cNvPr id="6" name="Shape 4"/>
+          <p:cNvPr id="8" name="Shape 6"/>
           <p:cNvSpPr/>
           <p:nvPr/>
         </p:nvSpPr>
@@ -7901,7 +8447,7 @@
       </p:sp>
       <p:sp>
         <p:nvSpPr>
-          <p:cNvPr id="7" name="Text 5"/>
+          <p:cNvPr id="9" name="Text 7"/>
           <p:cNvSpPr/>
           <p:nvPr/>
         </p:nvSpPr>
@@ -7940,7 +8486,7 @@
       </p:sp>
       <p:sp>
         <p:nvSpPr>
-          <p:cNvPr id="8" name="Text 6"/>
+          <p:cNvPr id="10" name="Text 8"/>
           <p:cNvSpPr/>
           <p:nvPr/>
         </p:nvSpPr>
@@ -7979,7 +8525,7 @@
       </p:sp>
       <p:sp>
         <p:nvSpPr>
-          <p:cNvPr id="9" name="Text 7"/>
+          <p:cNvPr id="11" name="Text 9"/>
           <p:cNvSpPr/>
           <p:nvPr/>
         </p:nvSpPr>
@@ -8018,7 +8564,7 @@
       </p:sp>
       <p:sp>
         <p:nvSpPr>
-          <p:cNvPr id="10" name="Text 8"/>
+          <p:cNvPr id="12" name="Text 10"/>
           <p:cNvSpPr/>
           <p:nvPr/>
         </p:nvSpPr>
@@ -8057,7 +8603,7 @@
       </p:sp>
       <p:sp>
         <p:nvSpPr>
-          <p:cNvPr id="11" name="Text 9"/>
+          <p:cNvPr id="13" name="Text 11"/>
           <p:cNvSpPr/>
           <p:nvPr/>
         </p:nvSpPr>
@@ -8096,7 +8642,7 @@
       </p:sp>
       <p:sp>
         <p:nvSpPr>
-          <p:cNvPr id="12" name="Text 10"/>
+          <p:cNvPr id="14" name="Text 12"/>
           <p:cNvSpPr/>
           <p:nvPr/>
         </p:nvSpPr>
@@ -8135,7 +8681,7 @@
       </p:sp>
       <p:sp>
         <p:nvSpPr>
-          <p:cNvPr id="13" name="Shape 11"/>
+          <p:cNvPr id="15" name="Shape 13"/>
           <p:cNvSpPr/>
           <p:nvPr/>
         </p:nvSpPr>
@@ -8162,7 +8708,7 @@
       </p:sp>
       <p:sp>
         <p:nvSpPr>
-          <p:cNvPr id="14" name="Shape 12"/>
+          <p:cNvPr id="16" name="Shape 14"/>
           <p:cNvSpPr/>
           <p:nvPr/>
         </p:nvSpPr>
@@ -8187,7 +8733,7 @@
       </p:sp>
       <p:sp>
         <p:nvSpPr>
-          <p:cNvPr id="15" name="Text 13"/>
+          <p:cNvPr id="17" name="Text 15"/>
           <p:cNvSpPr/>
           <p:nvPr/>
         </p:nvSpPr>
@@ -8226,7 +8772,7 @@
       </p:sp>
       <p:sp>
         <p:nvSpPr>
-          <p:cNvPr id="16" name="Text 14"/>
+          <p:cNvPr id="18" name="Text 16"/>
           <p:cNvSpPr/>
           <p:nvPr/>
         </p:nvSpPr>
@@ -8265,7 +8811,7 @@
       </p:sp>
       <p:sp>
         <p:nvSpPr>
-          <p:cNvPr id="17" name="Text 15"/>
+          <p:cNvPr id="19" name="Text 17"/>
           <p:cNvSpPr/>
           <p:nvPr/>
         </p:nvSpPr>
@@ -8304,7 +8850,7 @@
       </p:sp>
       <p:sp>
         <p:nvSpPr>
-          <p:cNvPr id="18" name="Text 16"/>
+          <p:cNvPr id="20" name="Text 18"/>
           <p:cNvSpPr/>
           <p:nvPr/>
         </p:nvSpPr>
@@ -8343,7 +8889,7 @@
       </p:sp>
       <p:sp>
         <p:nvSpPr>
-          <p:cNvPr id="19" name="Text 17"/>
+          <p:cNvPr id="21" name="Text 19"/>
           <p:cNvSpPr/>
           <p:nvPr/>
         </p:nvSpPr>
@@ -8382,7 +8928,7 @@
       </p:sp>
       <p:sp>
         <p:nvSpPr>
-          <p:cNvPr id="20" name="Text 18"/>
+          <p:cNvPr id="22" name="Text 20"/>
           <p:cNvSpPr/>
           <p:nvPr/>
         </p:nvSpPr>
@@ -8556,7 +9102,85 @@
       </p:sp>
       <p:sp>
         <p:nvSpPr>
-          <p:cNvPr id="5" name="Shape 3"/>
+          <p:cNvPr id="5" name="Text 3"/>
+          <p:cNvSpPr/>
+          <p:nvPr/>
+        </p:nvSpPr>
+        <p:spPr>
+          <a:xfrm>
+            <a:off x="411480" y="18288"/>
+            <a:ext cx="5852160" cy="146304"/>
+          </a:xfrm>
+          <a:prstGeom prst="rect">
+            <a:avLst/>
+          </a:prstGeom>
+          <a:noFill/>
+          <a:ln/>
+        </p:spPr>
+        <p:txBody>
+          <a:bodyPr wrap="square" lIns="0" tIns="0" rIns="0" bIns="0" rtlCol="0" anchor="ctr"/>
+          <a:lstStyle/>
+          <a:p>
+            <a:pPr indent="0" marL="0">
+              <a:buNone/>
+            </a:pPr>
+            <a:r>
+              <a:rPr lang="en-US" sz="800" b="1" dirty="0">
+                <a:solidFill>
+                  <a:srgbClr val="FECACA"/>
+                </a:solidFill>
+                <a:latin typeface="Calibri" pitchFamily="34" charset="0"/>
+                <a:ea typeface="Calibri" pitchFamily="34" charset="-122"/>
+                <a:cs typeface="Calibri" pitchFamily="34" charset="-120"/>
+              </a:rPr>
+              <a:t>LOCKHEED MARTIN PROPRIETARY INFORMATION</a:t>
+            </a:r>
+            <a:endParaRPr lang="en-US" sz="800" dirty="0"/>
+          </a:p>
+        </p:txBody>
+      </p:sp>
+      <p:sp>
+        <p:nvSpPr>
+          <p:cNvPr id="6" name="Text 4"/>
+          <p:cNvSpPr/>
+          <p:nvPr/>
+        </p:nvSpPr>
+        <p:spPr>
+          <a:xfrm>
+            <a:off x="411480" y="4919472"/>
+            <a:ext cx="7680960" cy="182880"/>
+          </a:xfrm>
+          <a:prstGeom prst="rect">
+            <a:avLst/>
+          </a:prstGeom>
+          <a:noFill/>
+          <a:ln/>
+        </p:spPr>
+        <p:txBody>
+          <a:bodyPr wrap="square" lIns="0" tIns="0" rIns="0" bIns="0" rtlCol="0" anchor="ctr"/>
+          <a:lstStyle/>
+          <a:p>
+            <a:pPr indent="0" marL="0">
+              <a:buNone/>
+            </a:pPr>
+            <a:r>
+              <a:rPr lang="en-US" sz="900" dirty="0">
+                <a:solidFill>
+                  <a:srgbClr val="94A3B8"/>
+                </a:solidFill>
+                <a:latin typeface="Calibri" pitchFamily="34" charset="0"/>
+                <a:ea typeface="Calibri" pitchFamily="34" charset="-122"/>
+                <a:cs typeface="Calibri" pitchFamily="34" charset="-120"/>
+              </a:rPr>
+              <a:t>Thomas Rathbun, PhD  ·  LOCKHEED MARTIN PROPRIETARY INFORMATION</a:t>
+            </a:r>
+            <a:endParaRPr lang="en-US" sz="900" dirty="0"/>
+          </a:p>
+        </p:txBody>
+      </p:sp>
+      <p:sp>
+        <p:nvSpPr>
+          <p:cNvPr id="7" name="Shape 5"/>
           <p:cNvSpPr/>
           <p:nvPr/>
         </p:nvSpPr>
@@ -8583,7 +9207,7 @@
       </p:sp>
       <p:sp>
         <p:nvSpPr>
-          <p:cNvPr id="6" name="Shape 4"/>
+          <p:cNvPr id="8" name="Shape 6"/>
           <p:cNvSpPr/>
           <p:nvPr/>
         </p:nvSpPr>
@@ -8608,7 +9232,7 @@
       </p:sp>
       <p:sp>
         <p:nvSpPr>
-          <p:cNvPr id="7" name="Text 5"/>
+          <p:cNvPr id="9" name="Text 7"/>
           <p:cNvSpPr/>
           <p:nvPr/>
         </p:nvSpPr>
@@ -8647,7 +9271,7 @@
       </p:sp>
       <p:sp>
         <p:nvSpPr>
-          <p:cNvPr id="8" name="Text 6"/>
+          <p:cNvPr id="10" name="Text 8"/>
           <p:cNvSpPr/>
           <p:nvPr/>
         </p:nvSpPr>
@@ -8686,7 +9310,7 @@
       </p:sp>
       <p:sp>
         <p:nvSpPr>
-          <p:cNvPr id="9" name="Shape 7"/>
+          <p:cNvPr id="11" name="Shape 9"/>
           <p:cNvSpPr/>
           <p:nvPr/>
         </p:nvSpPr>
@@ -8713,7 +9337,7 @@
       </p:sp>
       <p:sp>
         <p:nvSpPr>
-          <p:cNvPr id="10" name="Shape 8"/>
+          <p:cNvPr id="12" name="Shape 10"/>
           <p:cNvSpPr/>
           <p:nvPr/>
         </p:nvSpPr>
@@ -8738,7 +9362,7 @@
       </p:sp>
       <p:sp>
         <p:nvSpPr>
-          <p:cNvPr id="11" name="Text 9"/>
+          <p:cNvPr id="13" name="Text 11"/>
           <p:cNvSpPr/>
           <p:nvPr/>
         </p:nvSpPr>
@@ -8777,7 +9401,7 @@
       </p:sp>
       <p:sp>
         <p:nvSpPr>
-          <p:cNvPr id="12" name="Text 10"/>
+          <p:cNvPr id="14" name="Text 12"/>
           <p:cNvSpPr/>
           <p:nvPr/>
         </p:nvSpPr>
@@ -8816,7 +9440,7 @@
       </p:sp>
       <p:sp>
         <p:nvSpPr>
-          <p:cNvPr id="13" name="Shape 11"/>
+          <p:cNvPr id="15" name="Shape 13"/>
           <p:cNvSpPr/>
           <p:nvPr/>
         </p:nvSpPr>
@@ -8843,7 +9467,7 @@
       </p:sp>
       <p:sp>
         <p:nvSpPr>
-          <p:cNvPr id="14" name="Shape 12"/>
+          <p:cNvPr id="16" name="Shape 14"/>
           <p:cNvSpPr/>
           <p:nvPr/>
         </p:nvSpPr>
@@ -8868,7 +9492,7 @@
       </p:sp>
       <p:sp>
         <p:nvSpPr>
-          <p:cNvPr id="15" name="Text 13"/>
+          <p:cNvPr id="17" name="Text 15"/>
           <p:cNvSpPr/>
           <p:nvPr/>
         </p:nvSpPr>
@@ -8907,7 +9531,7 @@
       </p:sp>
       <p:sp>
         <p:nvSpPr>
-          <p:cNvPr id="16" name="Text 14"/>
+          <p:cNvPr id="18" name="Text 16"/>
           <p:cNvSpPr/>
           <p:nvPr/>
         </p:nvSpPr>
@@ -8946,7 +9570,7 @@
       </p:sp>
       <p:sp>
         <p:nvSpPr>
-          <p:cNvPr id="17" name="Shape 15"/>
+          <p:cNvPr id="19" name="Shape 17"/>
           <p:cNvSpPr/>
           <p:nvPr/>
         </p:nvSpPr>
@@ -8973,7 +9597,7 @@
       </p:sp>
       <p:sp>
         <p:nvSpPr>
-          <p:cNvPr id="18" name="Shape 16"/>
+          <p:cNvPr id="20" name="Shape 18"/>
           <p:cNvSpPr/>
           <p:nvPr/>
         </p:nvSpPr>
@@ -8998,7 +9622,7 @@
       </p:sp>
       <p:sp>
         <p:nvSpPr>
-          <p:cNvPr id="19" name="Text 17"/>
+          <p:cNvPr id="21" name="Text 19"/>
           <p:cNvSpPr/>
           <p:nvPr/>
         </p:nvSpPr>
@@ -9037,7 +9661,7 @@
       </p:sp>
       <p:sp>
         <p:nvSpPr>
-          <p:cNvPr id="20" name="Text 18"/>
+          <p:cNvPr id="22" name="Text 20"/>
           <p:cNvSpPr/>
           <p:nvPr/>
         </p:nvSpPr>
@@ -9076,7 +9700,7 @@
       </p:sp>
       <p:sp>
         <p:nvSpPr>
-          <p:cNvPr id="21" name="Shape 19"/>
+          <p:cNvPr id="23" name="Shape 21"/>
           <p:cNvSpPr/>
           <p:nvPr/>
         </p:nvSpPr>
@@ -9103,7 +9727,7 @@
       </p:sp>
       <p:sp>
         <p:nvSpPr>
-          <p:cNvPr id="22" name="Shape 20"/>
+          <p:cNvPr id="24" name="Shape 22"/>
           <p:cNvSpPr/>
           <p:nvPr/>
         </p:nvSpPr>
@@ -9128,7 +9752,7 @@
       </p:sp>
       <p:sp>
         <p:nvSpPr>
-          <p:cNvPr id="23" name="Text 21"/>
+          <p:cNvPr id="25" name="Text 23"/>
           <p:cNvSpPr/>
           <p:nvPr/>
         </p:nvSpPr>
@@ -9167,7 +9791,7 @@
       </p:sp>
       <p:sp>
         <p:nvSpPr>
-          <p:cNvPr id="24" name="Text 22"/>
+          <p:cNvPr id="26" name="Text 24"/>
           <p:cNvSpPr/>
           <p:nvPr/>
         </p:nvSpPr>
@@ -9206,7 +9830,7 @@
       </p:sp>
       <p:sp>
         <p:nvSpPr>
-          <p:cNvPr id="25" name="Shape 23"/>
+          <p:cNvPr id="27" name="Shape 25"/>
           <p:cNvSpPr/>
           <p:nvPr/>
         </p:nvSpPr>
@@ -9233,7 +9857,7 @@
       </p:sp>
       <p:sp>
         <p:nvSpPr>
-          <p:cNvPr id="26" name="Shape 24"/>
+          <p:cNvPr id="28" name="Shape 26"/>
           <p:cNvSpPr/>
           <p:nvPr/>
         </p:nvSpPr>
@@ -9258,7 +9882,7 @@
       </p:sp>
       <p:sp>
         <p:nvSpPr>
-          <p:cNvPr id="27" name="Text 25"/>
+          <p:cNvPr id="29" name="Text 27"/>
           <p:cNvSpPr/>
           <p:nvPr/>
         </p:nvSpPr>
@@ -9297,7 +9921,7 @@
       </p:sp>
       <p:sp>
         <p:nvSpPr>
-          <p:cNvPr id="28" name="Text 26"/>
+          <p:cNvPr id="30" name="Text 28"/>
           <p:cNvSpPr/>
           <p:nvPr/>
         </p:nvSpPr>
@@ -9471,7 +10095,85 @@
       </p:sp>
       <p:sp>
         <p:nvSpPr>
-          <p:cNvPr id="5" name="Shape 3"/>
+          <p:cNvPr id="5" name="Text 3"/>
+          <p:cNvSpPr/>
+          <p:nvPr/>
+        </p:nvSpPr>
+        <p:spPr>
+          <a:xfrm>
+            <a:off x="411480" y="18288"/>
+            <a:ext cx="5852160" cy="146304"/>
+          </a:xfrm>
+          <a:prstGeom prst="rect">
+            <a:avLst/>
+          </a:prstGeom>
+          <a:noFill/>
+          <a:ln/>
+        </p:spPr>
+        <p:txBody>
+          <a:bodyPr wrap="square" lIns="0" tIns="0" rIns="0" bIns="0" rtlCol="0" anchor="ctr"/>
+          <a:lstStyle/>
+          <a:p>
+            <a:pPr indent="0" marL="0">
+              <a:buNone/>
+            </a:pPr>
+            <a:r>
+              <a:rPr lang="en-US" sz="800" b="1" dirty="0">
+                <a:solidFill>
+                  <a:srgbClr val="FECACA"/>
+                </a:solidFill>
+                <a:latin typeface="Calibri" pitchFamily="34" charset="0"/>
+                <a:ea typeface="Calibri" pitchFamily="34" charset="-122"/>
+                <a:cs typeface="Calibri" pitchFamily="34" charset="-120"/>
+              </a:rPr>
+              <a:t>LOCKHEED MARTIN PROPRIETARY INFORMATION</a:t>
+            </a:r>
+            <a:endParaRPr lang="en-US" sz="800" dirty="0"/>
+          </a:p>
+        </p:txBody>
+      </p:sp>
+      <p:sp>
+        <p:nvSpPr>
+          <p:cNvPr id="6" name="Text 4"/>
+          <p:cNvSpPr/>
+          <p:nvPr/>
+        </p:nvSpPr>
+        <p:spPr>
+          <a:xfrm>
+            <a:off x="411480" y="4919472"/>
+            <a:ext cx="7680960" cy="182880"/>
+          </a:xfrm>
+          <a:prstGeom prst="rect">
+            <a:avLst/>
+          </a:prstGeom>
+          <a:noFill/>
+          <a:ln/>
+        </p:spPr>
+        <p:txBody>
+          <a:bodyPr wrap="square" lIns="0" tIns="0" rIns="0" bIns="0" rtlCol="0" anchor="ctr"/>
+          <a:lstStyle/>
+          <a:p>
+            <a:pPr indent="0" marL="0">
+              <a:buNone/>
+            </a:pPr>
+            <a:r>
+              <a:rPr lang="en-US" sz="900" dirty="0">
+                <a:solidFill>
+                  <a:srgbClr val="94A3B8"/>
+                </a:solidFill>
+                <a:latin typeface="Calibri" pitchFamily="34" charset="0"/>
+                <a:ea typeface="Calibri" pitchFamily="34" charset="-122"/>
+                <a:cs typeface="Calibri" pitchFamily="34" charset="-120"/>
+              </a:rPr>
+              <a:t>Thomas Rathbun, PhD  ·  LOCKHEED MARTIN PROPRIETARY INFORMATION</a:t>
+            </a:r>
+            <a:endParaRPr lang="en-US" sz="900" dirty="0"/>
+          </a:p>
+        </p:txBody>
+      </p:sp>
+      <p:sp>
+        <p:nvSpPr>
+          <p:cNvPr id="7" name="Shape 5"/>
           <p:cNvSpPr/>
           <p:nvPr/>
         </p:nvSpPr>
@@ -9498,7 +10200,7 @@
       </p:sp>
       <p:sp>
         <p:nvSpPr>
-          <p:cNvPr id="6" name="Shape 4"/>
+          <p:cNvPr id="8" name="Shape 6"/>
           <p:cNvSpPr/>
           <p:nvPr/>
         </p:nvSpPr>
@@ -9523,7 +10225,7 @@
       </p:sp>
       <p:sp>
         <p:nvSpPr>
-          <p:cNvPr id="7" name="Text 5"/>
+          <p:cNvPr id="9" name="Text 7"/>
           <p:cNvSpPr/>
           <p:nvPr/>
         </p:nvSpPr>
@@ -9562,7 +10264,7 @@
       </p:sp>
       <p:sp>
         <p:nvSpPr>
-          <p:cNvPr id="8" name="Text 6"/>
+          <p:cNvPr id="10" name="Text 8"/>
           <p:cNvSpPr/>
           <p:nvPr/>
         </p:nvSpPr>
@@ -9601,7 +10303,7 @@
       </p:sp>
       <p:sp>
         <p:nvSpPr>
-          <p:cNvPr id="9" name="Text 7"/>
+          <p:cNvPr id="11" name="Text 9"/>
           <p:cNvSpPr/>
           <p:nvPr/>
         </p:nvSpPr>
@@ -9640,7 +10342,7 @@
       </p:sp>
       <p:sp>
         <p:nvSpPr>
-          <p:cNvPr id="10" name="Shape 8"/>
+          <p:cNvPr id="12" name="Shape 10"/>
           <p:cNvSpPr/>
           <p:nvPr/>
         </p:nvSpPr>
@@ -9667,7 +10369,7 @@
       </p:sp>
       <p:sp>
         <p:nvSpPr>
-          <p:cNvPr id="11" name="Shape 9"/>
+          <p:cNvPr id="13" name="Shape 11"/>
           <p:cNvSpPr/>
           <p:nvPr/>
         </p:nvSpPr>
@@ -9692,7 +10394,7 @@
       </p:sp>
       <p:sp>
         <p:nvSpPr>
-          <p:cNvPr id="12" name="Text 10"/>
+          <p:cNvPr id="14" name="Text 12"/>
           <p:cNvSpPr/>
           <p:nvPr/>
         </p:nvSpPr>
@@ -9731,7 +10433,7 @@
       </p:sp>
       <p:sp>
         <p:nvSpPr>
-          <p:cNvPr id="13" name="Text 11"/>
+          <p:cNvPr id="15" name="Text 13"/>
           <p:cNvSpPr/>
           <p:nvPr/>
         </p:nvSpPr>
@@ -9770,7 +10472,7 @@
       </p:sp>
       <p:sp>
         <p:nvSpPr>
-          <p:cNvPr id="14" name="Text 12"/>
+          <p:cNvPr id="16" name="Text 14"/>
           <p:cNvSpPr/>
           <p:nvPr/>
         </p:nvSpPr>
@@ -9809,7 +10511,7 @@
       </p:sp>
       <p:sp>
         <p:nvSpPr>
-          <p:cNvPr id="15" name="Shape 13"/>
+          <p:cNvPr id="17" name="Shape 15"/>
           <p:cNvSpPr/>
           <p:nvPr/>
         </p:nvSpPr>
@@ -9836,7 +10538,7 @@
       </p:sp>
       <p:sp>
         <p:nvSpPr>
-          <p:cNvPr id="16" name="Shape 14"/>
+          <p:cNvPr id="18" name="Shape 16"/>
           <p:cNvSpPr/>
           <p:nvPr/>
         </p:nvSpPr>
@@ -9861,7 +10563,7 @@
       </p:sp>
       <p:sp>
         <p:nvSpPr>
-          <p:cNvPr id="17" name="Text 15"/>
+          <p:cNvPr id="19" name="Text 17"/>
           <p:cNvSpPr/>
           <p:nvPr/>
         </p:nvSpPr>
@@ -9900,7 +10602,7 @@
       </p:sp>
       <p:sp>
         <p:nvSpPr>
-          <p:cNvPr id="18" name="Text 16"/>
+          <p:cNvPr id="20" name="Text 18"/>
           <p:cNvSpPr/>
           <p:nvPr/>
         </p:nvSpPr>
@@ -9939,7 +10641,7 @@
       </p:sp>
       <p:sp>
         <p:nvSpPr>
-          <p:cNvPr id="19" name="Text 17"/>
+          <p:cNvPr id="21" name="Text 19"/>
           <p:cNvSpPr/>
           <p:nvPr/>
         </p:nvSpPr>
@@ -9978,7 +10680,7 @@
       </p:sp>
       <p:sp>
         <p:nvSpPr>
-          <p:cNvPr id="20" name="Shape 18"/>
+          <p:cNvPr id="22" name="Shape 20"/>
           <p:cNvSpPr/>
           <p:nvPr/>
         </p:nvSpPr>
@@ -10005,7 +10707,7 @@
       </p:sp>
       <p:sp>
         <p:nvSpPr>
-          <p:cNvPr id="21" name="Shape 19"/>
+          <p:cNvPr id="23" name="Shape 21"/>
           <p:cNvSpPr/>
           <p:nvPr/>
         </p:nvSpPr>
@@ -10030,7 +10732,7 @@
       </p:sp>
       <p:sp>
         <p:nvSpPr>
-          <p:cNvPr id="22" name="Text 20"/>
+          <p:cNvPr id="24" name="Text 22"/>
           <p:cNvSpPr/>
           <p:nvPr/>
         </p:nvSpPr>
@@ -10069,7 +10771,7 @@
       </p:sp>
       <p:sp>
         <p:nvSpPr>
-          <p:cNvPr id="23" name="Text 21"/>
+          <p:cNvPr id="25" name="Text 23"/>
           <p:cNvSpPr/>
           <p:nvPr/>
         </p:nvSpPr>
@@ -10108,7 +10810,7 @@
       </p:sp>
       <p:sp>
         <p:nvSpPr>
-          <p:cNvPr id="24" name="Text 22"/>
+          <p:cNvPr id="26" name="Text 24"/>
           <p:cNvSpPr/>
           <p:nvPr/>
         </p:nvSpPr>
@@ -10147,7 +10849,7 @@
       </p:sp>
       <p:sp>
         <p:nvSpPr>
-          <p:cNvPr id="25" name="Shape 23"/>
+          <p:cNvPr id="27" name="Shape 25"/>
           <p:cNvSpPr/>
           <p:nvPr/>
         </p:nvSpPr>
@@ -10174,7 +10876,7 @@
       </p:sp>
       <p:sp>
         <p:nvSpPr>
-          <p:cNvPr id="26" name="Shape 24"/>
+          <p:cNvPr id="28" name="Shape 26"/>
           <p:cNvSpPr/>
           <p:nvPr/>
         </p:nvSpPr>
@@ -10199,7 +10901,7 @@
       </p:sp>
       <p:sp>
         <p:nvSpPr>
-          <p:cNvPr id="27" name="Text 25"/>
+          <p:cNvPr id="29" name="Text 27"/>
           <p:cNvSpPr/>
           <p:nvPr/>
         </p:nvSpPr>
@@ -10238,7 +10940,7 @@
       </p:sp>
       <p:sp>
         <p:nvSpPr>
-          <p:cNvPr id="28" name="Text 26"/>
+          <p:cNvPr id="30" name="Text 28"/>
           <p:cNvSpPr/>
           <p:nvPr/>
         </p:nvSpPr>
@@ -10277,7 +10979,7 @@
       </p:sp>
       <p:sp>
         <p:nvSpPr>
-          <p:cNvPr id="29" name="Text 27"/>
+          <p:cNvPr id="31" name="Text 29"/>
           <p:cNvSpPr/>
           <p:nvPr/>
         </p:nvSpPr>
@@ -10316,7 +11018,7 @@
       </p:sp>
       <p:sp>
         <p:nvSpPr>
-          <p:cNvPr id="30" name="Shape 28"/>
+          <p:cNvPr id="32" name="Shape 30"/>
           <p:cNvSpPr/>
           <p:nvPr/>
         </p:nvSpPr>
@@ -10343,7 +11045,7 @@
       </p:sp>
       <p:sp>
         <p:nvSpPr>
-          <p:cNvPr id="31" name="Shape 29"/>
+          <p:cNvPr id="33" name="Shape 31"/>
           <p:cNvSpPr/>
           <p:nvPr/>
         </p:nvSpPr>
@@ -10368,7 +11070,7 @@
       </p:sp>
       <p:sp>
         <p:nvSpPr>
-          <p:cNvPr id="32" name="Text 30"/>
+          <p:cNvPr id="34" name="Text 32"/>
           <p:cNvSpPr/>
           <p:nvPr/>
         </p:nvSpPr>
@@ -10407,7 +11109,7 @@
       </p:sp>
       <p:sp>
         <p:nvSpPr>
-          <p:cNvPr id="33" name="Text 31"/>
+          <p:cNvPr id="35" name="Text 33"/>
           <p:cNvSpPr/>
           <p:nvPr/>
         </p:nvSpPr>
@@ -10446,7 +11148,7 @@
       </p:sp>
       <p:sp>
         <p:nvSpPr>
-          <p:cNvPr id="34" name="Text 32"/>
+          <p:cNvPr id="36" name="Text 34"/>
           <p:cNvSpPr/>
           <p:nvPr/>
         </p:nvSpPr>
@@ -10620,7 +11322,85 @@
       </p:sp>
       <p:sp>
         <p:nvSpPr>
-          <p:cNvPr id="5" name="Shape 3"/>
+          <p:cNvPr id="5" name="Text 3"/>
+          <p:cNvSpPr/>
+          <p:nvPr/>
+        </p:nvSpPr>
+        <p:spPr>
+          <a:xfrm>
+            <a:off x="411480" y="18288"/>
+            <a:ext cx="5852160" cy="146304"/>
+          </a:xfrm>
+          <a:prstGeom prst="rect">
+            <a:avLst/>
+          </a:prstGeom>
+          <a:noFill/>
+          <a:ln/>
+        </p:spPr>
+        <p:txBody>
+          <a:bodyPr wrap="square" lIns="0" tIns="0" rIns="0" bIns="0" rtlCol="0" anchor="ctr"/>
+          <a:lstStyle/>
+          <a:p>
+            <a:pPr indent="0" marL="0">
+              <a:buNone/>
+            </a:pPr>
+            <a:r>
+              <a:rPr lang="en-US" sz="800" b="1" dirty="0">
+                <a:solidFill>
+                  <a:srgbClr val="FECACA"/>
+                </a:solidFill>
+                <a:latin typeface="Calibri" pitchFamily="34" charset="0"/>
+                <a:ea typeface="Calibri" pitchFamily="34" charset="-122"/>
+                <a:cs typeface="Calibri" pitchFamily="34" charset="-120"/>
+              </a:rPr>
+              <a:t>LOCKHEED MARTIN PROPRIETARY INFORMATION</a:t>
+            </a:r>
+            <a:endParaRPr lang="en-US" sz="800" dirty="0"/>
+          </a:p>
+        </p:txBody>
+      </p:sp>
+      <p:sp>
+        <p:nvSpPr>
+          <p:cNvPr id="6" name="Text 4"/>
+          <p:cNvSpPr/>
+          <p:nvPr/>
+        </p:nvSpPr>
+        <p:spPr>
+          <a:xfrm>
+            <a:off x="411480" y="4919472"/>
+            <a:ext cx="7680960" cy="182880"/>
+          </a:xfrm>
+          <a:prstGeom prst="rect">
+            <a:avLst/>
+          </a:prstGeom>
+          <a:noFill/>
+          <a:ln/>
+        </p:spPr>
+        <p:txBody>
+          <a:bodyPr wrap="square" lIns="0" tIns="0" rIns="0" bIns="0" rtlCol="0" anchor="ctr"/>
+          <a:lstStyle/>
+          <a:p>
+            <a:pPr indent="0" marL="0">
+              <a:buNone/>
+            </a:pPr>
+            <a:r>
+              <a:rPr lang="en-US" sz="900" dirty="0">
+                <a:solidFill>
+                  <a:srgbClr val="94A3B8"/>
+                </a:solidFill>
+                <a:latin typeface="Calibri" pitchFamily="34" charset="0"/>
+                <a:ea typeface="Calibri" pitchFamily="34" charset="-122"/>
+                <a:cs typeface="Calibri" pitchFamily="34" charset="-120"/>
+              </a:rPr>
+              <a:t>Thomas Rathbun, PhD  ·  LOCKHEED MARTIN PROPRIETARY INFORMATION</a:t>
+            </a:r>
+            <a:endParaRPr lang="en-US" sz="900" dirty="0"/>
+          </a:p>
+        </p:txBody>
+      </p:sp>
+      <p:sp>
+        <p:nvSpPr>
+          <p:cNvPr id="7" name="Shape 5"/>
           <p:cNvSpPr/>
           <p:nvPr/>
         </p:nvSpPr>
@@ -10647,7 +11427,7 @@
       </p:sp>
       <p:sp>
         <p:nvSpPr>
-          <p:cNvPr id="6" name="Text 4"/>
+          <p:cNvPr id="8" name="Text 6"/>
           <p:cNvSpPr/>
           <p:nvPr/>
         </p:nvSpPr>
@@ -10686,7 +11466,7 @@
       </p:sp>
       <p:sp>
         <p:nvSpPr>
-          <p:cNvPr id="7" name="Text 5"/>
+          <p:cNvPr id="9" name="Text 7"/>
           <p:cNvSpPr/>
           <p:nvPr/>
         </p:nvSpPr>
@@ -10725,7 +11505,7 @@
       </p:sp>
       <p:sp>
         <p:nvSpPr>
-          <p:cNvPr id="8" name="Text 6"/>
+          <p:cNvPr id="10" name="Text 8"/>
           <p:cNvSpPr/>
           <p:nvPr/>
         </p:nvSpPr>
@@ -10764,7 +11544,7 @@
       </p:sp>
       <p:sp>
         <p:nvSpPr>
-          <p:cNvPr id="9" name="Shape 7"/>
+          <p:cNvPr id="11" name="Shape 9"/>
           <p:cNvSpPr/>
           <p:nvPr/>
         </p:nvSpPr>
@@ -10791,7 +11571,7 @@
       </p:sp>
       <p:sp>
         <p:nvSpPr>
-          <p:cNvPr id="10" name="Text 8"/>
+          <p:cNvPr id="12" name="Text 10"/>
           <p:cNvSpPr/>
           <p:nvPr/>
         </p:nvSpPr>
@@ -10830,7 +11610,7 @@
       </p:sp>
       <p:sp>
         <p:nvSpPr>
-          <p:cNvPr id="11" name="Text 9"/>
+          <p:cNvPr id="13" name="Text 11"/>
           <p:cNvSpPr/>
           <p:nvPr/>
         </p:nvSpPr>
@@ -10869,7 +11649,7 @@
       </p:sp>
       <p:sp>
         <p:nvSpPr>
-          <p:cNvPr id="12" name="Text 10"/>
+          <p:cNvPr id="14" name="Text 12"/>
           <p:cNvSpPr/>
           <p:nvPr/>
         </p:nvSpPr>
@@ -10908,7 +11688,7 @@
       </p:sp>
       <p:sp>
         <p:nvSpPr>
-          <p:cNvPr id="13" name="Shape 11"/>
+          <p:cNvPr id="15" name="Shape 13"/>
           <p:cNvSpPr/>
           <p:nvPr/>
         </p:nvSpPr>
@@ -10935,7 +11715,7 @@
       </p:sp>
       <p:sp>
         <p:nvSpPr>
-          <p:cNvPr id="14" name="Text 12"/>
+          <p:cNvPr id="16" name="Text 14"/>
           <p:cNvSpPr/>
           <p:nvPr/>
         </p:nvSpPr>
@@ -10974,7 +11754,7 @@
       </p:sp>
       <p:sp>
         <p:nvSpPr>
-          <p:cNvPr id="15" name="Text 13"/>
+          <p:cNvPr id="17" name="Text 15"/>
           <p:cNvSpPr/>
           <p:nvPr/>
         </p:nvSpPr>
@@ -11013,7 +11793,7 @@
       </p:sp>
       <p:sp>
         <p:nvSpPr>
-          <p:cNvPr id="16" name="Text 14"/>
+          <p:cNvPr id="18" name="Text 16"/>
           <p:cNvSpPr/>
           <p:nvPr/>
         </p:nvSpPr>
@@ -11052,7 +11832,7 @@
       </p:sp>
       <p:sp>
         <p:nvSpPr>
-          <p:cNvPr id="17" name="Shape 15"/>
+          <p:cNvPr id="19" name="Shape 17"/>
           <p:cNvSpPr/>
           <p:nvPr/>
         </p:nvSpPr>
@@ -11079,7 +11859,7 @@
       </p:sp>
       <p:sp>
         <p:nvSpPr>
-          <p:cNvPr id="18" name="Text 16"/>
+          <p:cNvPr id="20" name="Text 18"/>
           <p:cNvSpPr/>
           <p:nvPr/>
         </p:nvSpPr>
@@ -11118,7 +11898,7 @@
       </p:sp>
       <p:sp>
         <p:nvSpPr>
-          <p:cNvPr id="19" name="Text 17"/>
+          <p:cNvPr id="21" name="Text 19"/>
           <p:cNvSpPr/>
           <p:nvPr/>
         </p:nvSpPr>
@@ -11157,7 +11937,7 @@
       </p:sp>
       <p:sp>
         <p:nvSpPr>
-          <p:cNvPr id="20" name="Text 18"/>
+          <p:cNvPr id="22" name="Text 20"/>
           <p:cNvSpPr/>
           <p:nvPr/>
         </p:nvSpPr>
@@ -11196,7 +11976,7 @@
       </p:sp>
       <p:sp>
         <p:nvSpPr>
-          <p:cNvPr id="21" name="Shape 19"/>
+          <p:cNvPr id="23" name="Shape 21"/>
           <p:cNvSpPr/>
           <p:nvPr/>
         </p:nvSpPr>
@@ -11223,7 +12003,7 @@
       </p:sp>
       <p:sp>
         <p:nvSpPr>
-          <p:cNvPr id="22" name="Text 20"/>
+          <p:cNvPr id="24" name="Text 22"/>
           <p:cNvSpPr/>
           <p:nvPr/>
         </p:nvSpPr>
@@ -11262,7 +12042,7 @@
       </p:sp>
       <p:sp>
         <p:nvSpPr>
-          <p:cNvPr id="23" name="Text 21"/>
+          <p:cNvPr id="25" name="Text 23"/>
           <p:cNvSpPr/>
           <p:nvPr/>
         </p:nvSpPr>
@@ -11301,7 +12081,7 @@
       </p:sp>
       <p:sp>
         <p:nvSpPr>
-          <p:cNvPr id="24" name="Text 22"/>
+          <p:cNvPr id="26" name="Text 24"/>
           <p:cNvSpPr/>
           <p:nvPr/>
         </p:nvSpPr>
@@ -11340,7 +12120,7 @@
       </p:sp>
       <p:sp>
         <p:nvSpPr>
-          <p:cNvPr id="25" name="Shape 23"/>
+          <p:cNvPr id="27" name="Shape 25"/>
           <p:cNvSpPr/>
           <p:nvPr/>
         </p:nvSpPr>
@@ -11367,7 +12147,7 @@
       </p:sp>
       <p:sp>
         <p:nvSpPr>
-          <p:cNvPr id="26" name="Text 24"/>
+          <p:cNvPr id="28" name="Text 26"/>
           <p:cNvSpPr/>
           <p:nvPr/>
         </p:nvSpPr>
@@ -11406,7 +12186,7 @@
       </p:sp>
       <p:sp>
         <p:nvSpPr>
-          <p:cNvPr id="27" name="Text 25"/>
+          <p:cNvPr id="29" name="Text 27"/>
           <p:cNvSpPr/>
           <p:nvPr/>
         </p:nvSpPr>
@@ -11445,7 +12225,7 @@
       </p:sp>
       <p:sp>
         <p:nvSpPr>
-          <p:cNvPr id="28" name="Text 26"/>
+          <p:cNvPr id="30" name="Text 28"/>
           <p:cNvSpPr/>
           <p:nvPr/>
         </p:nvSpPr>
@@ -11619,7 +12399,85 @@
       </p:sp>
       <p:sp>
         <p:nvSpPr>
-          <p:cNvPr id="5" name="Shape 3"/>
+          <p:cNvPr id="5" name="Text 3"/>
+          <p:cNvSpPr/>
+          <p:nvPr/>
+        </p:nvSpPr>
+        <p:spPr>
+          <a:xfrm>
+            <a:off x="411480" y="18288"/>
+            <a:ext cx="5852160" cy="146304"/>
+          </a:xfrm>
+          <a:prstGeom prst="rect">
+            <a:avLst/>
+          </a:prstGeom>
+          <a:noFill/>
+          <a:ln/>
+        </p:spPr>
+        <p:txBody>
+          <a:bodyPr wrap="square" lIns="0" tIns="0" rIns="0" bIns="0" rtlCol="0" anchor="ctr"/>
+          <a:lstStyle/>
+          <a:p>
+            <a:pPr indent="0" marL="0">
+              <a:buNone/>
+            </a:pPr>
+            <a:r>
+              <a:rPr lang="en-US" sz="800" b="1" dirty="0">
+                <a:solidFill>
+                  <a:srgbClr val="FECACA"/>
+                </a:solidFill>
+                <a:latin typeface="Calibri" pitchFamily="34" charset="0"/>
+                <a:ea typeface="Calibri" pitchFamily="34" charset="-122"/>
+                <a:cs typeface="Calibri" pitchFamily="34" charset="-120"/>
+              </a:rPr>
+              <a:t>LOCKHEED MARTIN PROPRIETARY INFORMATION</a:t>
+            </a:r>
+            <a:endParaRPr lang="en-US" sz="800" dirty="0"/>
+          </a:p>
+        </p:txBody>
+      </p:sp>
+      <p:sp>
+        <p:nvSpPr>
+          <p:cNvPr id="6" name="Text 4"/>
+          <p:cNvSpPr/>
+          <p:nvPr/>
+        </p:nvSpPr>
+        <p:spPr>
+          <a:xfrm>
+            <a:off x="411480" y="4919472"/>
+            <a:ext cx="7680960" cy="182880"/>
+          </a:xfrm>
+          <a:prstGeom prst="rect">
+            <a:avLst/>
+          </a:prstGeom>
+          <a:noFill/>
+          <a:ln/>
+        </p:spPr>
+        <p:txBody>
+          <a:bodyPr wrap="square" lIns="0" tIns="0" rIns="0" bIns="0" rtlCol="0" anchor="ctr"/>
+          <a:lstStyle/>
+          <a:p>
+            <a:pPr indent="0" marL="0">
+              <a:buNone/>
+            </a:pPr>
+            <a:r>
+              <a:rPr lang="en-US" sz="900" dirty="0">
+                <a:solidFill>
+                  <a:srgbClr val="94A3B8"/>
+                </a:solidFill>
+                <a:latin typeface="Calibri" pitchFamily="34" charset="0"/>
+                <a:ea typeface="Calibri" pitchFamily="34" charset="-122"/>
+                <a:cs typeface="Calibri" pitchFamily="34" charset="-120"/>
+              </a:rPr>
+              <a:t>Thomas Rathbun, PhD  ·  LOCKHEED MARTIN PROPRIETARY INFORMATION</a:t>
+            </a:r>
+            <a:endParaRPr lang="en-US" sz="900" dirty="0"/>
+          </a:p>
+        </p:txBody>
+      </p:sp>
+      <p:sp>
+        <p:nvSpPr>
+          <p:cNvPr id="7" name="Shape 5"/>
           <p:cNvSpPr/>
           <p:nvPr/>
         </p:nvSpPr>
@@ -11646,7 +12504,7 @@
       </p:sp>
       <p:sp>
         <p:nvSpPr>
-          <p:cNvPr id="6" name="Text 4"/>
+          <p:cNvPr id="8" name="Text 6"/>
           <p:cNvSpPr/>
           <p:nvPr/>
         </p:nvSpPr>
@@ -11685,7 +12543,7 @@
       </p:sp>
       <p:sp>
         <p:nvSpPr>
-          <p:cNvPr id="7" name="Text 5"/>
+          <p:cNvPr id="9" name="Text 7"/>
           <p:cNvSpPr/>
           <p:nvPr/>
         </p:nvSpPr>
@@ -11724,7 +12582,7 @@
       </p:sp>
       <p:sp>
         <p:nvSpPr>
-          <p:cNvPr id="8" name="Shape 6"/>
+          <p:cNvPr id="10" name="Shape 8"/>
           <p:cNvSpPr/>
           <p:nvPr/>
         </p:nvSpPr>
@@ -11751,7 +12609,7 @@
       </p:sp>
       <p:sp>
         <p:nvSpPr>
-          <p:cNvPr id="9" name="Text 7"/>
+          <p:cNvPr id="11" name="Text 9"/>
           <p:cNvSpPr/>
           <p:nvPr/>
         </p:nvSpPr>
@@ -11790,7 +12648,7 @@
       </p:sp>
       <p:sp>
         <p:nvSpPr>
-          <p:cNvPr id="10" name="Text 8"/>
+          <p:cNvPr id="12" name="Text 10"/>
           <p:cNvSpPr/>
           <p:nvPr/>
         </p:nvSpPr>
@@ -11829,7 +12687,7 @@
       </p:sp>
       <p:sp>
         <p:nvSpPr>
-          <p:cNvPr id="11" name="Shape 9"/>
+          <p:cNvPr id="13" name="Shape 11"/>
           <p:cNvSpPr/>
           <p:nvPr/>
         </p:nvSpPr>
@@ -11856,7 +12714,7 @@
       </p:sp>
       <p:sp>
         <p:nvSpPr>
-          <p:cNvPr id="12" name="Text 10"/>
+          <p:cNvPr id="14" name="Text 12"/>
           <p:cNvSpPr/>
           <p:nvPr/>
         </p:nvSpPr>
@@ -11895,7 +12753,7 @@
       </p:sp>
       <p:sp>
         <p:nvSpPr>
-          <p:cNvPr id="13" name="Text 11"/>
+          <p:cNvPr id="15" name="Text 13"/>
           <p:cNvSpPr/>
           <p:nvPr/>
         </p:nvSpPr>
@@ -11934,7 +12792,7 @@
       </p:sp>
       <p:sp>
         <p:nvSpPr>
-          <p:cNvPr id="14" name="Shape 12"/>
+          <p:cNvPr id="16" name="Shape 14"/>
           <p:cNvSpPr/>
           <p:nvPr/>
         </p:nvSpPr>
@@ -11961,7 +12819,7 @@
       </p:sp>
       <p:sp>
         <p:nvSpPr>
-          <p:cNvPr id="15" name="Text 13"/>
+          <p:cNvPr id="17" name="Text 15"/>
           <p:cNvSpPr/>
           <p:nvPr/>
         </p:nvSpPr>
@@ -12000,7 +12858,7 @@
       </p:sp>
       <p:sp>
         <p:nvSpPr>
-          <p:cNvPr id="16" name="Text 14"/>
+          <p:cNvPr id="18" name="Text 16"/>
           <p:cNvSpPr/>
           <p:nvPr/>
         </p:nvSpPr>
@@ -12174,7 +13032,85 @@
       </p:sp>
       <p:sp>
         <p:nvSpPr>
-          <p:cNvPr id="5" name="Shape 3"/>
+          <p:cNvPr id="5" name="Text 3"/>
+          <p:cNvSpPr/>
+          <p:nvPr/>
+        </p:nvSpPr>
+        <p:spPr>
+          <a:xfrm>
+            <a:off x="411480" y="18288"/>
+            <a:ext cx="5852160" cy="146304"/>
+          </a:xfrm>
+          <a:prstGeom prst="rect">
+            <a:avLst/>
+          </a:prstGeom>
+          <a:noFill/>
+          <a:ln/>
+        </p:spPr>
+        <p:txBody>
+          <a:bodyPr wrap="square" lIns="0" tIns="0" rIns="0" bIns="0" rtlCol="0" anchor="ctr"/>
+          <a:lstStyle/>
+          <a:p>
+            <a:pPr indent="0" marL="0">
+              <a:buNone/>
+            </a:pPr>
+            <a:r>
+              <a:rPr lang="en-US" sz="800" b="1" dirty="0">
+                <a:solidFill>
+                  <a:srgbClr val="FECACA"/>
+                </a:solidFill>
+                <a:latin typeface="Calibri" pitchFamily="34" charset="0"/>
+                <a:ea typeface="Calibri" pitchFamily="34" charset="-122"/>
+                <a:cs typeface="Calibri" pitchFamily="34" charset="-120"/>
+              </a:rPr>
+              <a:t>LOCKHEED MARTIN PROPRIETARY INFORMATION</a:t>
+            </a:r>
+            <a:endParaRPr lang="en-US" sz="800" dirty="0"/>
+          </a:p>
+        </p:txBody>
+      </p:sp>
+      <p:sp>
+        <p:nvSpPr>
+          <p:cNvPr id="6" name="Text 4"/>
+          <p:cNvSpPr/>
+          <p:nvPr/>
+        </p:nvSpPr>
+        <p:spPr>
+          <a:xfrm>
+            <a:off x="411480" y="4919472"/>
+            <a:ext cx="7680960" cy="182880"/>
+          </a:xfrm>
+          <a:prstGeom prst="rect">
+            <a:avLst/>
+          </a:prstGeom>
+          <a:noFill/>
+          <a:ln/>
+        </p:spPr>
+        <p:txBody>
+          <a:bodyPr wrap="square" lIns="0" tIns="0" rIns="0" bIns="0" rtlCol="0" anchor="ctr"/>
+          <a:lstStyle/>
+          <a:p>
+            <a:pPr indent="0" marL="0">
+              <a:buNone/>
+            </a:pPr>
+            <a:r>
+              <a:rPr lang="en-US" sz="900" dirty="0">
+                <a:solidFill>
+                  <a:srgbClr val="94A3B8"/>
+                </a:solidFill>
+                <a:latin typeface="Calibri" pitchFamily="34" charset="0"/>
+                <a:ea typeface="Calibri" pitchFamily="34" charset="-122"/>
+                <a:cs typeface="Calibri" pitchFamily="34" charset="-120"/>
+              </a:rPr>
+              <a:t>Thomas Rathbun, PhD  ·  LOCKHEED MARTIN PROPRIETARY INFORMATION</a:t>
+            </a:r>
+            <a:endParaRPr lang="en-US" sz="900" dirty="0"/>
+          </a:p>
+        </p:txBody>
+      </p:sp>
+      <p:sp>
+        <p:nvSpPr>
+          <p:cNvPr id="7" name="Shape 5"/>
           <p:cNvSpPr/>
           <p:nvPr/>
         </p:nvSpPr>
@@ -12201,7 +13137,7 @@
       </p:sp>
       <p:sp>
         <p:nvSpPr>
-          <p:cNvPr id="6" name="Shape 4"/>
+          <p:cNvPr id="8" name="Shape 6"/>
           <p:cNvSpPr/>
           <p:nvPr/>
         </p:nvSpPr>
@@ -12226,7 +13162,7 @@
       </p:sp>
       <p:sp>
         <p:nvSpPr>
-          <p:cNvPr id="7" name="Text 5"/>
+          <p:cNvPr id="9" name="Text 7"/>
           <p:cNvSpPr/>
           <p:nvPr/>
         </p:nvSpPr>
@@ -12265,7 +13201,7 @@
       </p:sp>
       <p:sp>
         <p:nvSpPr>
-          <p:cNvPr id="8" name="Text 6"/>
+          <p:cNvPr id="10" name="Text 8"/>
           <p:cNvSpPr/>
           <p:nvPr/>
         </p:nvSpPr>
@@ -12304,7 +13240,7 @@
       </p:sp>
       <p:sp>
         <p:nvSpPr>
-          <p:cNvPr id="9" name="Text 7"/>
+          <p:cNvPr id="11" name="Text 9"/>
           <p:cNvSpPr/>
           <p:nvPr/>
         </p:nvSpPr>
@@ -12343,7 +13279,7 @@
       </p:sp>
       <p:sp>
         <p:nvSpPr>
-          <p:cNvPr id="10" name="Shape 8"/>
+          <p:cNvPr id="12" name="Shape 10"/>
           <p:cNvSpPr/>
           <p:nvPr/>
         </p:nvSpPr>
@@ -12370,7 +13306,7 @@
       </p:sp>
       <p:sp>
         <p:nvSpPr>
-          <p:cNvPr id="11" name="Shape 9"/>
+          <p:cNvPr id="13" name="Shape 11"/>
           <p:cNvSpPr/>
           <p:nvPr/>
         </p:nvSpPr>
@@ -12395,7 +13331,7 @@
       </p:sp>
       <p:sp>
         <p:nvSpPr>
-          <p:cNvPr id="12" name="Text 10"/>
+          <p:cNvPr id="14" name="Text 12"/>
           <p:cNvSpPr/>
           <p:nvPr/>
         </p:nvSpPr>
@@ -12434,7 +13370,7 @@
       </p:sp>
       <p:sp>
         <p:nvSpPr>
-          <p:cNvPr id="13" name="Text 11"/>
+          <p:cNvPr id="15" name="Text 13"/>
           <p:cNvSpPr/>
           <p:nvPr/>
         </p:nvSpPr>
@@ -12473,7 +13409,7 @@
       </p:sp>
       <p:sp>
         <p:nvSpPr>
-          <p:cNvPr id="14" name="Text 12"/>
+          <p:cNvPr id="16" name="Text 14"/>
           <p:cNvSpPr/>
           <p:nvPr/>
         </p:nvSpPr>
@@ -12512,7 +13448,7 @@
       </p:sp>
       <p:sp>
         <p:nvSpPr>
-          <p:cNvPr id="15" name="Shape 13"/>
+          <p:cNvPr id="17" name="Shape 15"/>
           <p:cNvSpPr/>
           <p:nvPr/>
         </p:nvSpPr>
@@ -12539,7 +13475,7 @@
       </p:sp>
       <p:sp>
         <p:nvSpPr>
-          <p:cNvPr id="16" name="Shape 14"/>
+          <p:cNvPr id="18" name="Shape 16"/>
           <p:cNvSpPr/>
           <p:nvPr/>
         </p:nvSpPr>
@@ -12564,7 +13500,7 @@
       </p:sp>
       <p:sp>
         <p:nvSpPr>
-          <p:cNvPr id="17" name="Text 15"/>
+          <p:cNvPr id="19" name="Text 17"/>
           <p:cNvSpPr/>
           <p:nvPr/>
         </p:nvSpPr>
@@ -12603,7 +13539,7 @@
       </p:sp>
       <p:sp>
         <p:nvSpPr>
-          <p:cNvPr id="18" name="Text 16"/>
+          <p:cNvPr id="20" name="Text 18"/>
           <p:cNvSpPr/>
           <p:nvPr/>
         </p:nvSpPr>
@@ -12642,7 +13578,7 @@
       </p:sp>
       <p:sp>
         <p:nvSpPr>
-          <p:cNvPr id="19" name="Text 17"/>
+          <p:cNvPr id="21" name="Text 19"/>
           <p:cNvSpPr/>
           <p:nvPr/>
         </p:nvSpPr>
@@ -12681,7 +13617,7 @@
       </p:sp>
       <p:sp>
         <p:nvSpPr>
-          <p:cNvPr id="20" name="Shape 18"/>
+          <p:cNvPr id="22" name="Shape 20"/>
           <p:cNvSpPr/>
           <p:nvPr/>
         </p:nvSpPr>
@@ -12708,7 +13644,7 @@
       </p:sp>
       <p:sp>
         <p:nvSpPr>
-          <p:cNvPr id="21" name="Shape 19"/>
+          <p:cNvPr id="23" name="Shape 21"/>
           <p:cNvSpPr/>
           <p:nvPr/>
         </p:nvSpPr>
@@ -12733,7 +13669,7 @@
       </p:sp>
       <p:sp>
         <p:nvSpPr>
-          <p:cNvPr id="22" name="Text 20"/>
+          <p:cNvPr id="24" name="Text 22"/>
           <p:cNvSpPr/>
           <p:nvPr/>
         </p:nvSpPr>
@@ -12772,7 +13708,7 @@
       </p:sp>
       <p:sp>
         <p:nvSpPr>
-          <p:cNvPr id="23" name="Text 21"/>
+          <p:cNvPr id="25" name="Text 23"/>
           <p:cNvSpPr/>
           <p:nvPr/>
         </p:nvSpPr>
@@ -12811,7 +13747,7 @@
       </p:sp>
       <p:sp>
         <p:nvSpPr>
-          <p:cNvPr id="24" name="Text 22"/>
+          <p:cNvPr id="26" name="Text 24"/>
           <p:cNvSpPr/>
           <p:nvPr/>
         </p:nvSpPr>
@@ -12850,7 +13786,7 @@
       </p:sp>
       <p:sp>
         <p:nvSpPr>
-          <p:cNvPr id="25" name="Shape 23"/>
+          <p:cNvPr id="27" name="Shape 25"/>
           <p:cNvSpPr/>
           <p:nvPr/>
         </p:nvSpPr>
@@ -12877,7 +13813,7 @@
       </p:sp>
       <p:sp>
         <p:nvSpPr>
-          <p:cNvPr id="26" name="Shape 24"/>
+          <p:cNvPr id="28" name="Shape 26"/>
           <p:cNvSpPr/>
           <p:nvPr/>
         </p:nvSpPr>
@@ -12902,7 +13838,7 @@
       </p:sp>
       <p:sp>
         <p:nvSpPr>
-          <p:cNvPr id="27" name="Text 25"/>
+          <p:cNvPr id="29" name="Text 27"/>
           <p:cNvSpPr/>
           <p:nvPr/>
         </p:nvSpPr>
@@ -12941,7 +13877,7 @@
       </p:sp>
       <p:sp>
         <p:nvSpPr>
-          <p:cNvPr id="28" name="Text 26"/>
+          <p:cNvPr id="30" name="Text 28"/>
           <p:cNvSpPr/>
           <p:nvPr/>
         </p:nvSpPr>
@@ -12980,7 +13916,7 @@
       </p:sp>
       <p:sp>
         <p:nvSpPr>
-          <p:cNvPr id="29" name="Text 27"/>
+          <p:cNvPr id="31" name="Text 29"/>
           <p:cNvSpPr/>
           <p:nvPr/>
         </p:nvSpPr>
@@ -13019,7 +13955,7 @@
       </p:sp>
       <p:sp>
         <p:nvSpPr>
-          <p:cNvPr id="30" name="Shape 28"/>
+          <p:cNvPr id="32" name="Shape 30"/>
           <p:cNvSpPr/>
           <p:nvPr/>
         </p:nvSpPr>
@@ -13046,7 +13982,7 @@
       </p:sp>
       <p:sp>
         <p:nvSpPr>
-          <p:cNvPr id="31" name="Shape 29"/>
+          <p:cNvPr id="33" name="Shape 31"/>
           <p:cNvSpPr/>
           <p:nvPr/>
         </p:nvSpPr>
@@ -13071,7 +14007,7 @@
       </p:sp>
       <p:sp>
         <p:nvSpPr>
-          <p:cNvPr id="32" name="Text 30"/>
+          <p:cNvPr id="34" name="Text 32"/>
           <p:cNvSpPr/>
           <p:nvPr/>
         </p:nvSpPr>
@@ -13110,7 +14046,7 @@
       </p:sp>
       <p:sp>
         <p:nvSpPr>
-          <p:cNvPr id="33" name="Text 31"/>
+          <p:cNvPr id="35" name="Text 33"/>
           <p:cNvSpPr/>
           <p:nvPr/>
         </p:nvSpPr>
@@ -13149,7 +14085,7 @@
       </p:sp>
       <p:sp>
         <p:nvSpPr>
-          <p:cNvPr id="34" name="Text 32"/>
+          <p:cNvPr id="36" name="Text 34"/>
           <p:cNvSpPr/>
           <p:nvPr/>
         </p:nvSpPr>
@@ -13290,6 +14226,84 @@
         </p:nvSpPr>
         <p:spPr>
           <a:xfrm>
+            <a:off x="502920" y="164592"/>
+            <a:ext cx="7772400" cy="201168"/>
+          </a:xfrm>
+          <a:prstGeom prst="rect">
+            <a:avLst/>
+          </a:prstGeom>
+          <a:noFill/>
+          <a:ln/>
+        </p:spPr>
+        <p:txBody>
+          <a:bodyPr wrap="square" lIns="0" tIns="0" rIns="0" bIns="0" rtlCol="0" anchor="ctr"/>
+          <a:lstStyle/>
+          <a:p>
+            <a:pPr indent="0" marL="0">
+              <a:buNone/>
+            </a:pPr>
+            <a:r>
+              <a:rPr lang="en-US" sz="1000" b="1" dirty="0">
+                <a:solidFill>
+                  <a:srgbClr val="FECACA"/>
+                </a:solidFill>
+                <a:latin typeface="Calibri" pitchFamily="34" charset="0"/>
+                <a:ea typeface="Calibri" pitchFamily="34" charset="-122"/>
+                <a:cs typeface="Calibri" pitchFamily="34" charset="-120"/>
+              </a:rPr>
+              <a:t>LOCKHEED MARTIN PROPRIETARY INFORMATION</a:t>
+            </a:r>
+            <a:endParaRPr lang="en-US" sz="1000" dirty="0"/>
+          </a:p>
+        </p:txBody>
+      </p:sp>
+      <p:sp>
+        <p:nvSpPr>
+          <p:cNvPr id="5" name="Text 3"/>
+          <p:cNvSpPr/>
+          <p:nvPr/>
+        </p:nvSpPr>
+        <p:spPr>
+          <a:xfrm>
+            <a:off x="502920" y="4828032"/>
+            <a:ext cx="8046720" cy="201168"/>
+          </a:xfrm>
+          <a:prstGeom prst="rect">
+            <a:avLst/>
+          </a:prstGeom>
+          <a:noFill/>
+          <a:ln/>
+        </p:spPr>
+        <p:txBody>
+          <a:bodyPr wrap="square" lIns="0" tIns="0" rIns="0" bIns="0" rtlCol="0" anchor="ctr"/>
+          <a:lstStyle/>
+          <a:p>
+            <a:pPr indent="0" marL="0">
+              <a:buNone/>
+            </a:pPr>
+            <a:r>
+              <a:rPr lang="en-US" sz="1000" dirty="0">
+                <a:solidFill>
+                  <a:srgbClr val="94A3B8"/>
+                </a:solidFill>
+                <a:latin typeface="Calibri" pitchFamily="34" charset="0"/>
+                <a:ea typeface="Calibri" pitchFamily="34" charset="-122"/>
+                <a:cs typeface="Calibri" pitchFamily="34" charset="-120"/>
+              </a:rPr>
+              <a:t>Thomas Rathbun, PhD  ·  LOCKHEED MARTIN PROPRIETARY INFORMATION</a:t>
+            </a:r>
+            <a:endParaRPr lang="en-US" sz="1000" dirty="0"/>
+          </a:p>
+        </p:txBody>
+      </p:sp>
+      <p:sp>
+        <p:nvSpPr>
+          <p:cNvPr id="6" name="Text 4"/>
+          <p:cNvSpPr/>
+          <p:nvPr/>
+        </p:nvSpPr>
+        <p:spPr>
+          <a:xfrm>
             <a:off x="502920" y="2103120"/>
             <a:ext cx="8229600" cy="640080"/>
           </a:xfrm>
@@ -13323,7 +14337,7 @@
       </p:sp>
       <p:sp>
         <p:nvSpPr>
-          <p:cNvPr id="5" name="Text 3"/>
+          <p:cNvPr id="7" name="Text 5"/>
           <p:cNvSpPr/>
           <p:nvPr/>
         </p:nvSpPr>
@@ -13514,7 +14528,85 @@
       </p:sp>
       <p:sp>
         <p:nvSpPr>
-          <p:cNvPr id="5" name="Shape 3"/>
+          <p:cNvPr id="5" name="Text 3"/>
+          <p:cNvSpPr/>
+          <p:nvPr/>
+        </p:nvSpPr>
+        <p:spPr>
+          <a:xfrm>
+            <a:off x="411480" y="18288"/>
+            <a:ext cx="5852160" cy="146304"/>
+          </a:xfrm>
+          <a:prstGeom prst="rect">
+            <a:avLst/>
+          </a:prstGeom>
+          <a:noFill/>
+          <a:ln/>
+        </p:spPr>
+        <p:txBody>
+          <a:bodyPr wrap="square" lIns="0" tIns="0" rIns="0" bIns="0" rtlCol="0" anchor="ctr"/>
+          <a:lstStyle/>
+          <a:p>
+            <a:pPr indent="0" marL="0">
+              <a:buNone/>
+            </a:pPr>
+            <a:r>
+              <a:rPr lang="en-US" sz="800" b="1" dirty="0">
+                <a:solidFill>
+                  <a:srgbClr val="FECACA"/>
+                </a:solidFill>
+                <a:latin typeface="Calibri" pitchFamily="34" charset="0"/>
+                <a:ea typeface="Calibri" pitchFamily="34" charset="-122"/>
+                <a:cs typeface="Calibri" pitchFamily="34" charset="-120"/>
+              </a:rPr>
+              <a:t>LOCKHEED MARTIN PROPRIETARY INFORMATION</a:t>
+            </a:r>
+            <a:endParaRPr lang="en-US" sz="800" dirty="0"/>
+          </a:p>
+        </p:txBody>
+      </p:sp>
+      <p:sp>
+        <p:nvSpPr>
+          <p:cNvPr id="6" name="Text 4"/>
+          <p:cNvSpPr/>
+          <p:nvPr/>
+        </p:nvSpPr>
+        <p:spPr>
+          <a:xfrm>
+            <a:off x="411480" y="4919472"/>
+            <a:ext cx="7680960" cy="182880"/>
+          </a:xfrm>
+          <a:prstGeom prst="rect">
+            <a:avLst/>
+          </a:prstGeom>
+          <a:noFill/>
+          <a:ln/>
+        </p:spPr>
+        <p:txBody>
+          <a:bodyPr wrap="square" lIns="0" tIns="0" rIns="0" bIns="0" rtlCol="0" anchor="ctr"/>
+          <a:lstStyle/>
+          <a:p>
+            <a:pPr indent="0" marL="0">
+              <a:buNone/>
+            </a:pPr>
+            <a:r>
+              <a:rPr lang="en-US" sz="900" dirty="0">
+                <a:solidFill>
+                  <a:srgbClr val="94A3B8"/>
+                </a:solidFill>
+                <a:latin typeface="Calibri" pitchFamily="34" charset="0"/>
+                <a:ea typeface="Calibri" pitchFamily="34" charset="-122"/>
+                <a:cs typeface="Calibri" pitchFamily="34" charset="-120"/>
+              </a:rPr>
+              <a:t>Thomas Rathbun, PhD  ·  LOCKHEED MARTIN PROPRIETARY INFORMATION</a:t>
+            </a:r>
+            <a:endParaRPr lang="en-US" sz="900" dirty="0"/>
+          </a:p>
+        </p:txBody>
+      </p:sp>
+      <p:sp>
+        <p:nvSpPr>
+          <p:cNvPr id="7" name="Shape 5"/>
           <p:cNvSpPr/>
           <p:nvPr/>
         </p:nvSpPr>
@@ -13541,7 +14633,7 @@
       </p:sp>
       <p:sp>
         <p:nvSpPr>
-          <p:cNvPr id="6" name="Shape 4"/>
+          <p:cNvPr id="8" name="Shape 6"/>
           <p:cNvSpPr/>
           <p:nvPr/>
         </p:nvSpPr>
@@ -13566,7 +14658,7 @@
       </p:sp>
       <p:sp>
         <p:nvSpPr>
-          <p:cNvPr id="7" name="Text 5"/>
+          <p:cNvPr id="9" name="Text 7"/>
           <p:cNvSpPr/>
           <p:nvPr/>
         </p:nvSpPr>
@@ -13605,7 +14697,7 @@
       </p:sp>
       <p:sp>
         <p:nvSpPr>
-          <p:cNvPr id="8" name="Text 6"/>
+          <p:cNvPr id="10" name="Text 8"/>
           <p:cNvSpPr/>
           <p:nvPr/>
         </p:nvSpPr>
@@ -13644,7 +14736,7 @@
       </p:sp>
       <p:sp>
         <p:nvSpPr>
-          <p:cNvPr id="9" name="Text 7"/>
+          <p:cNvPr id="11" name="Text 9"/>
           <p:cNvSpPr/>
           <p:nvPr/>
         </p:nvSpPr>
@@ -13683,7 +14775,7 @@
       </p:sp>
       <p:sp>
         <p:nvSpPr>
-          <p:cNvPr id="10" name="Text 8"/>
+          <p:cNvPr id="12" name="Text 10"/>
           <p:cNvSpPr/>
           <p:nvPr/>
         </p:nvSpPr>
@@ -13722,7 +14814,7 @@
       </p:sp>
       <p:sp>
         <p:nvSpPr>
-          <p:cNvPr id="11" name="Text 9"/>
+          <p:cNvPr id="13" name="Text 11"/>
           <p:cNvSpPr/>
           <p:nvPr/>
         </p:nvSpPr>
@@ -13761,7 +14853,7 @@
       </p:sp>
       <p:sp>
         <p:nvSpPr>
-          <p:cNvPr id="12" name="Text 10"/>
+          <p:cNvPr id="14" name="Text 12"/>
           <p:cNvSpPr/>
           <p:nvPr/>
         </p:nvSpPr>
@@ -13800,7 +14892,7 @@
       </p:sp>
       <p:sp>
         <p:nvSpPr>
-          <p:cNvPr id="13" name="Shape 11"/>
+          <p:cNvPr id="15" name="Shape 13"/>
           <p:cNvSpPr/>
           <p:nvPr/>
         </p:nvSpPr>
@@ -13827,7 +14919,7 @@
       </p:sp>
       <p:sp>
         <p:nvSpPr>
-          <p:cNvPr id="14" name="Shape 12"/>
+          <p:cNvPr id="16" name="Shape 14"/>
           <p:cNvSpPr/>
           <p:nvPr/>
         </p:nvSpPr>
@@ -13852,7 +14944,7 @@
       </p:sp>
       <p:sp>
         <p:nvSpPr>
-          <p:cNvPr id="15" name="Text 13"/>
+          <p:cNvPr id="17" name="Text 15"/>
           <p:cNvSpPr/>
           <p:nvPr/>
         </p:nvSpPr>
@@ -13891,7 +14983,7 @@
       </p:sp>
       <p:sp>
         <p:nvSpPr>
-          <p:cNvPr id="16" name="Text 14"/>
+          <p:cNvPr id="18" name="Text 16"/>
           <p:cNvSpPr/>
           <p:nvPr/>
         </p:nvSpPr>
@@ -13930,7 +15022,7 @@
       </p:sp>
       <p:sp>
         <p:nvSpPr>
-          <p:cNvPr id="17" name="Text 15"/>
+          <p:cNvPr id="19" name="Text 17"/>
           <p:cNvSpPr/>
           <p:nvPr/>
         </p:nvSpPr>
@@ -13969,7 +15061,7 @@
       </p:sp>
       <p:sp>
         <p:nvSpPr>
-          <p:cNvPr id="18" name="Text 16"/>
+          <p:cNvPr id="20" name="Text 18"/>
           <p:cNvSpPr/>
           <p:nvPr/>
         </p:nvSpPr>
@@ -14008,7 +15100,7 @@
       </p:sp>
       <p:sp>
         <p:nvSpPr>
-          <p:cNvPr id="19" name="Text 17"/>
+          <p:cNvPr id="21" name="Text 19"/>
           <p:cNvSpPr/>
           <p:nvPr/>
         </p:nvSpPr>
@@ -14047,7 +15139,7 @@
       </p:sp>
       <p:sp>
         <p:nvSpPr>
-          <p:cNvPr id="20" name="Text 18"/>
+          <p:cNvPr id="22" name="Text 20"/>
           <p:cNvSpPr/>
           <p:nvPr/>
         </p:nvSpPr>
@@ -14221,7 +15313,85 @@
       </p:sp>
       <p:sp>
         <p:nvSpPr>
-          <p:cNvPr id="5" name="Shape 3"/>
+          <p:cNvPr id="5" name="Text 3"/>
+          <p:cNvSpPr/>
+          <p:nvPr/>
+        </p:nvSpPr>
+        <p:spPr>
+          <a:xfrm>
+            <a:off x="411480" y="18288"/>
+            <a:ext cx="5852160" cy="146304"/>
+          </a:xfrm>
+          <a:prstGeom prst="rect">
+            <a:avLst/>
+          </a:prstGeom>
+          <a:noFill/>
+          <a:ln/>
+        </p:spPr>
+        <p:txBody>
+          <a:bodyPr wrap="square" lIns="0" tIns="0" rIns="0" bIns="0" rtlCol="0" anchor="ctr"/>
+          <a:lstStyle/>
+          <a:p>
+            <a:pPr indent="0" marL="0">
+              <a:buNone/>
+            </a:pPr>
+            <a:r>
+              <a:rPr lang="en-US" sz="800" b="1" dirty="0">
+                <a:solidFill>
+                  <a:srgbClr val="FECACA"/>
+                </a:solidFill>
+                <a:latin typeface="Calibri" pitchFamily="34" charset="0"/>
+                <a:ea typeface="Calibri" pitchFamily="34" charset="-122"/>
+                <a:cs typeface="Calibri" pitchFamily="34" charset="-120"/>
+              </a:rPr>
+              <a:t>LOCKHEED MARTIN PROPRIETARY INFORMATION</a:t>
+            </a:r>
+            <a:endParaRPr lang="en-US" sz="800" dirty="0"/>
+          </a:p>
+        </p:txBody>
+      </p:sp>
+      <p:sp>
+        <p:nvSpPr>
+          <p:cNvPr id="6" name="Text 4"/>
+          <p:cNvSpPr/>
+          <p:nvPr/>
+        </p:nvSpPr>
+        <p:spPr>
+          <a:xfrm>
+            <a:off x="411480" y="4919472"/>
+            <a:ext cx="7680960" cy="182880"/>
+          </a:xfrm>
+          <a:prstGeom prst="rect">
+            <a:avLst/>
+          </a:prstGeom>
+          <a:noFill/>
+          <a:ln/>
+        </p:spPr>
+        <p:txBody>
+          <a:bodyPr wrap="square" lIns="0" tIns="0" rIns="0" bIns="0" rtlCol="0" anchor="ctr"/>
+          <a:lstStyle/>
+          <a:p>
+            <a:pPr indent="0" marL="0">
+              <a:buNone/>
+            </a:pPr>
+            <a:r>
+              <a:rPr lang="en-US" sz="900" dirty="0">
+                <a:solidFill>
+                  <a:srgbClr val="94A3B8"/>
+                </a:solidFill>
+                <a:latin typeface="Calibri" pitchFamily="34" charset="0"/>
+                <a:ea typeface="Calibri" pitchFamily="34" charset="-122"/>
+                <a:cs typeface="Calibri" pitchFamily="34" charset="-120"/>
+              </a:rPr>
+              <a:t>Thomas Rathbun, PhD  ·  LOCKHEED MARTIN PROPRIETARY INFORMATION</a:t>
+            </a:r>
+            <a:endParaRPr lang="en-US" sz="900" dirty="0"/>
+          </a:p>
+        </p:txBody>
+      </p:sp>
+      <p:sp>
+        <p:nvSpPr>
+          <p:cNvPr id="7" name="Shape 5"/>
           <p:cNvSpPr/>
           <p:nvPr/>
         </p:nvSpPr>
@@ -14248,7 +15418,7 @@
       </p:sp>
       <p:sp>
         <p:nvSpPr>
-          <p:cNvPr id="6" name="Shape 4"/>
+          <p:cNvPr id="8" name="Shape 6"/>
           <p:cNvSpPr/>
           <p:nvPr/>
         </p:nvSpPr>
@@ -14273,7 +15443,7 @@
       </p:sp>
       <p:sp>
         <p:nvSpPr>
-          <p:cNvPr id="7" name="Text 5"/>
+          <p:cNvPr id="9" name="Text 7"/>
           <p:cNvSpPr/>
           <p:nvPr/>
         </p:nvSpPr>
@@ -14312,7 +15482,7 @@
       </p:sp>
       <p:sp>
         <p:nvSpPr>
-          <p:cNvPr id="8" name="Text 6"/>
+          <p:cNvPr id="10" name="Text 8"/>
           <p:cNvSpPr/>
           <p:nvPr/>
         </p:nvSpPr>
@@ -14351,7 +15521,7 @@
       </p:sp>
       <p:sp>
         <p:nvSpPr>
-          <p:cNvPr id="9" name="Text 7"/>
+          <p:cNvPr id="11" name="Text 9"/>
           <p:cNvSpPr/>
           <p:nvPr/>
         </p:nvSpPr>
@@ -14390,7 +15560,7 @@
       </p:sp>
       <p:sp>
         <p:nvSpPr>
-          <p:cNvPr id="10" name="Text 8"/>
+          <p:cNvPr id="12" name="Text 10"/>
           <p:cNvSpPr/>
           <p:nvPr/>
         </p:nvSpPr>
@@ -14429,7 +15599,7 @@
       </p:sp>
       <p:sp>
         <p:nvSpPr>
-          <p:cNvPr id="11" name="Text 9"/>
+          <p:cNvPr id="13" name="Text 11"/>
           <p:cNvSpPr/>
           <p:nvPr/>
         </p:nvSpPr>
@@ -14468,7 +15638,7 @@
       </p:sp>
       <p:sp>
         <p:nvSpPr>
-          <p:cNvPr id="12" name="Shape 10"/>
+          <p:cNvPr id="14" name="Shape 12"/>
           <p:cNvSpPr/>
           <p:nvPr/>
         </p:nvSpPr>
@@ -14495,7 +15665,7 @@
       </p:sp>
       <p:sp>
         <p:nvSpPr>
-          <p:cNvPr id="13" name="Shape 11"/>
+          <p:cNvPr id="15" name="Shape 13"/>
           <p:cNvSpPr/>
           <p:nvPr/>
         </p:nvSpPr>
@@ -14520,7 +15690,7 @@
       </p:sp>
       <p:sp>
         <p:nvSpPr>
-          <p:cNvPr id="14" name="Text 12"/>
+          <p:cNvPr id="16" name="Text 14"/>
           <p:cNvSpPr/>
           <p:nvPr/>
         </p:nvSpPr>
@@ -14559,7 +15729,7 @@
       </p:sp>
       <p:sp>
         <p:nvSpPr>
-          <p:cNvPr id="15" name="Text 13"/>
+          <p:cNvPr id="17" name="Text 15"/>
           <p:cNvSpPr/>
           <p:nvPr/>
         </p:nvSpPr>
@@ -14598,7 +15768,7 @@
       </p:sp>
       <p:sp>
         <p:nvSpPr>
-          <p:cNvPr id="16" name="Text 14"/>
+          <p:cNvPr id="18" name="Text 16"/>
           <p:cNvSpPr/>
           <p:nvPr/>
         </p:nvSpPr>
@@ -14637,7 +15807,7 @@
       </p:sp>
       <p:sp>
         <p:nvSpPr>
-          <p:cNvPr id="17" name="Text 15"/>
+          <p:cNvPr id="19" name="Text 17"/>
           <p:cNvSpPr/>
           <p:nvPr/>
         </p:nvSpPr>
@@ -14676,7 +15846,7 @@
       </p:sp>
       <p:sp>
         <p:nvSpPr>
-          <p:cNvPr id="18" name="Text 16"/>
+          <p:cNvPr id="20" name="Text 18"/>
           <p:cNvSpPr/>
           <p:nvPr/>
         </p:nvSpPr>
@@ -14715,7 +15885,7 @@
       </p:sp>
       <p:sp>
         <p:nvSpPr>
-          <p:cNvPr id="19" name="Shape 17"/>
+          <p:cNvPr id="21" name="Shape 19"/>
           <p:cNvSpPr/>
           <p:nvPr/>
         </p:nvSpPr>
@@ -14742,7 +15912,7 @@
       </p:sp>
       <p:sp>
         <p:nvSpPr>
-          <p:cNvPr id="20" name="Shape 18"/>
+          <p:cNvPr id="22" name="Shape 20"/>
           <p:cNvSpPr/>
           <p:nvPr/>
         </p:nvSpPr>
@@ -14767,7 +15937,7 @@
       </p:sp>
       <p:sp>
         <p:nvSpPr>
-          <p:cNvPr id="21" name="Text 19"/>
+          <p:cNvPr id="23" name="Text 21"/>
           <p:cNvSpPr/>
           <p:nvPr/>
         </p:nvSpPr>
@@ -14806,7 +15976,7 @@
       </p:sp>
       <p:sp>
         <p:nvSpPr>
-          <p:cNvPr id="22" name="Text 20"/>
+          <p:cNvPr id="24" name="Text 22"/>
           <p:cNvSpPr/>
           <p:nvPr/>
         </p:nvSpPr>
@@ -14845,7 +16015,7 @@
       </p:sp>
       <p:sp>
         <p:nvSpPr>
-          <p:cNvPr id="23" name="Text 21"/>
+          <p:cNvPr id="25" name="Text 23"/>
           <p:cNvSpPr/>
           <p:nvPr/>
         </p:nvSpPr>
@@ -14884,7 +16054,7 @@
       </p:sp>
       <p:sp>
         <p:nvSpPr>
-          <p:cNvPr id="24" name="Text 22"/>
+          <p:cNvPr id="26" name="Text 24"/>
           <p:cNvSpPr/>
           <p:nvPr/>
         </p:nvSpPr>
@@ -14923,7 +16093,7 @@
       </p:sp>
       <p:sp>
         <p:nvSpPr>
-          <p:cNvPr id="25" name="Text 23"/>
+          <p:cNvPr id="27" name="Text 25"/>
           <p:cNvSpPr/>
           <p:nvPr/>
         </p:nvSpPr>
@@ -15097,7 +16267,85 @@
       </p:sp>
       <p:sp>
         <p:nvSpPr>
-          <p:cNvPr id="5" name="Shape 3"/>
+          <p:cNvPr id="5" name="Text 3"/>
+          <p:cNvSpPr/>
+          <p:nvPr/>
+        </p:nvSpPr>
+        <p:spPr>
+          <a:xfrm>
+            <a:off x="411480" y="18288"/>
+            <a:ext cx="5852160" cy="146304"/>
+          </a:xfrm>
+          <a:prstGeom prst="rect">
+            <a:avLst/>
+          </a:prstGeom>
+          <a:noFill/>
+          <a:ln/>
+        </p:spPr>
+        <p:txBody>
+          <a:bodyPr wrap="square" lIns="0" tIns="0" rIns="0" bIns="0" rtlCol="0" anchor="ctr"/>
+          <a:lstStyle/>
+          <a:p>
+            <a:pPr indent="0" marL="0">
+              <a:buNone/>
+            </a:pPr>
+            <a:r>
+              <a:rPr lang="en-US" sz="800" b="1" dirty="0">
+                <a:solidFill>
+                  <a:srgbClr val="FECACA"/>
+                </a:solidFill>
+                <a:latin typeface="Calibri" pitchFamily="34" charset="0"/>
+                <a:ea typeface="Calibri" pitchFamily="34" charset="-122"/>
+                <a:cs typeface="Calibri" pitchFamily="34" charset="-120"/>
+              </a:rPr>
+              <a:t>LOCKHEED MARTIN PROPRIETARY INFORMATION</a:t>
+            </a:r>
+            <a:endParaRPr lang="en-US" sz="800" dirty="0"/>
+          </a:p>
+        </p:txBody>
+      </p:sp>
+      <p:sp>
+        <p:nvSpPr>
+          <p:cNvPr id="6" name="Text 4"/>
+          <p:cNvSpPr/>
+          <p:nvPr/>
+        </p:nvSpPr>
+        <p:spPr>
+          <a:xfrm>
+            <a:off x="411480" y="4919472"/>
+            <a:ext cx="7680960" cy="182880"/>
+          </a:xfrm>
+          <a:prstGeom prst="rect">
+            <a:avLst/>
+          </a:prstGeom>
+          <a:noFill/>
+          <a:ln/>
+        </p:spPr>
+        <p:txBody>
+          <a:bodyPr wrap="square" lIns="0" tIns="0" rIns="0" bIns="0" rtlCol="0" anchor="ctr"/>
+          <a:lstStyle/>
+          <a:p>
+            <a:pPr indent="0" marL="0">
+              <a:buNone/>
+            </a:pPr>
+            <a:r>
+              <a:rPr lang="en-US" sz="900" dirty="0">
+                <a:solidFill>
+                  <a:srgbClr val="94A3B8"/>
+                </a:solidFill>
+                <a:latin typeface="Calibri" pitchFamily="34" charset="0"/>
+                <a:ea typeface="Calibri" pitchFamily="34" charset="-122"/>
+                <a:cs typeface="Calibri" pitchFamily="34" charset="-120"/>
+              </a:rPr>
+              <a:t>Thomas Rathbun, PhD  ·  LOCKHEED MARTIN PROPRIETARY INFORMATION</a:t>
+            </a:r>
+            <a:endParaRPr lang="en-US" sz="900" dirty="0"/>
+          </a:p>
+        </p:txBody>
+      </p:sp>
+      <p:sp>
+        <p:nvSpPr>
+          <p:cNvPr id="7" name="Shape 5"/>
           <p:cNvSpPr/>
           <p:nvPr/>
         </p:nvSpPr>
@@ -15124,7 +16372,7 @@
       </p:sp>
       <p:sp>
         <p:nvSpPr>
-          <p:cNvPr id="6" name="Shape 4"/>
+          <p:cNvPr id="8" name="Shape 6"/>
           <p:cNvSpPr/>
           <p:nvPr/>
         </p:nvSpPr>
@@ -15149,7 +16397,7 @@
       </p:sp>
       <p:sp>
         <p:nvSpPr>
-          <p:cNvPr id="7" name="Text 5"/>
+          <p:cNvPr id="9" name="Text 7"/>
           <p:cNvSpPr/>
           <p:nvPr/>
         </p:nvSpPr>
@@ -15205,7 +16453,7 @@
       </p:sp>
       <p:sp>
         <p:nvSpPr>
-          <p:cNvPr id="8" name="Text 6"/>
+          <p:cNvPr id="10" name="Text 8"/>
           <p:cNvSpPr/>
           <p:nvPr/>
         </p:nvSpPr>
@@ -15244,7 +16492,7 @@
       </p:sp>
       <p:sp>
         <p:nvSpPr>
-          <p:cNvPr id="9" name="Text 7"/>
+          <p:cNvPr id="11" name="Text 9"/>
           <p:cNvSpPr/>
           <p:nvPr/>
         </p:nvSpPr>
@@ -15283,7 +16531,7 @@
       </p:sp>
       <p:sp>
         <p:nvSpPr>
-          <p:cNvPr id="10" name="Shape 8"/>
+          <p:cNvPr id="12" name="Shape 10"/>
           <p:cNvSpPr/>
           <p:nvPr/>
         </p:nvSpPr>
@@ -15310,7 +16558,7 @@
       </p:sp>
       <p:sp>
         <p:nvSpPr>
-          <p:cNvPr id="11" name="Shape 9"/>
+          <p:cNvPr id="13" name="Shape 11"/>
           <p:cNvSpPr/>
           <p:nvPr/>
         </p:nvSpPr>
@@ -15335,7 +16583,7 @@
       </p:sp>
       <p:sp>
         <p:nvSpPr>
-          <p:cNvPr id="12" name="Text 10"/>
+          <p:cNvPr id="14" name="Text 12"/>
           <p:cNvSpPr/>
           <p:nvPr/>
         </p:nvSpPr>
@@ -15391,7 +16639,7 @@
       </p:sp>
       <p:sp>
         <p:nvSpPr>
-          <p:cNvPr id="13" name="Text 11"/>
+          <p:cNvPr id="15" name="Text 13"/>
           <p:cNvSpPr/>
           <p:nvPr/>
         </p:nvSpPr>
@@ -15430,7 +16678,7 @@
       </p:sp>
       <p:sp>
         <p:nvSpPr>
-          <p:cNvPr id="14" name="Text 12"/>
+          <p:cNvPr id="16" name="Text 14"/>
           <p:cNvSpPr/>
           <p:nvPr/>
         </p:nvSpPr>
@@ -15469,7 +16717,7 @@
       </p:sp>
       <p:sp>
         <p:nvSpPr>
-          <p:cNvPr id="15" name="Shape 13"/>
+          <p:cNvPr id="17" name="Shape 15"/>
           <p:cNvSpPr/>
           <p:nvPr/>
         </p:nvSpPr>
@@ -15496,7 +16744,7 @@
       </p:sp>
       <p:sp>
         <p:nvSpPr>
-          <p:cNvPr id="16" name="Shape 14"/>
+          <p:cNvPr id="18" name="Shape 16"/>
           <p:cNvSpPr/>
           <p:nvPr/>
         </p:nvSpPr>
@@ -15521,7 +16769,7 @@
       </p:sp>
       <p:sp>
         <p:nvSpPr>
-          <p:cNvPr id="17" name="Text 15"/>
+          <p:cNvPr id="19" name="Text 17"/>
           <p:cNvSpPr/>
           <p:nvPr/>
         </p:nvSpPr>
@@ -15577,7 +16825,7 @@
       </p:sp>
       <p:sp>
         <p:nvSpPr>
-          <p:cNvPr id="18" name="Text 16"/>
+          <p:cNvPr id="20" name="Text 18"/>
           <p:cNvSpPr/>
           <p:nvPr/>
         </p:nvSpPr>
@@ -15616,7 +16864,7 @@
       </p:sp>
       <p:sp>
         <p:nvSpPr>
-          <p:cNvPr id="19" name="Text 17"/>
+          <p:cNvPr id="21" name="Text 19"/>
           <p:cNvSpPr/>
           <p:nvPr/>
         </p:nvSpPr>
@@ -15655,7 +16903,7 @@
       </p:sp>
       <p:sp>
         <p:nvSpPr>
-          <p:cNvPr id="20" name="Shape 18"/>
+          <p:cNvPr id="22" name="Shape 20"/>
           <p:cNvSpPr/>
           <p:nvPr/>
         </p:nvSpPr>
@@ -15682,7 +16930,7 @@
       </p:sp>
       <p:sp>
         <p:nvSpPr>
-          <p:cNvPr id="21" name="Shape 19"/>
+          <p:cNvPr id="23" name="Shape 21"/>
           <p:cNvSpPr/>
           <p:nvPr/>
         </p:nvSpPr>
@@ -15707,7 +16955,7 @@
       </p:sp>
       <p:sp>
         <p:nvSpPr>
-          <p:cNvPr id="22" name="Text 20"/>
+          <p:cNvPr id="24" name="Text 22"/>
           <p:cNvSpPr/>
           <p:nvPr/>
         </p:nvSpPr>
@@ -15763,7 +17011,7 @@
       </p:sp>
       <p:sp>
         <p:nvSpPr>
-          <p:cNvPr id="23" name="Text 21"/>
+          <p:cNvPr id="25" name="Text 23"/>
           <p:cNvSpPr/>
           <p:nvPr/>
         </p:nvSpPr>
@@ -15802,7 +17050,7 @@
       </p:sp>
       <p:sp>
         <p:nvSpPr>
-          <p:cNvPr id="24" name="Text 22"/>
+          <p:cNvPr id="26" name="Text 24"/>
           <p:cNvSpPr/>
           <p:nvPr/>
         </p:nvSpPr>
@@ -15841,7 +17089,7 @@
       </p:sp>
       <p:sp>
         <p:nvSpPr>
-          <p:cNvPr id="25" name="Shape 23"/>
+          <p:cNvPr id="27" name="Shape 25"/>
           <p:cNvSpPr/>
           <p:nvPr/>
         </p:nvSpPr>
@@ -15868,7 +17116,7 @@
       </p:sp>
       <p:sp>
         <p:nvSpPr>
-          <p:cNvPr id="26" name="Shape 24"/>
+          <p:cNvPr id="28" name="Shape 26"/>
           <p:cNvSpPr/>
           <p:nvPr/>
         </p:nvSpPr>
@@ -15893,7 +17141,7 @@
       </p:sp>
       <p:sp>
         <p:nvSpPr>
-          <p:cNvPr id="27" name="Text 25"/>
+          <p:cNvPr id="29" name="Text 27"/>
           <p:cNvSpPr/>
           <p:nvPr/>
         </p:nvSpPr>
@@ -15949,7 +17197,7 @@
       </p:sp>
       <p:sp>
         <p:nvSpPr>
-          <p:cNvPr id="28" name="Text 26"/>
+          <p:cNvPr id="30" name="Text 28"/>
           <p:cNvSpPr/>
           <p:nvPr/>
         </p:nvSpPr>
@@ -15988,7 +17236,7 @@
       </p:sp>
       <p:sp>
         <p:nvSpPr>
-          <p:cNvPr id="29" name="Shape 27"/>
+          <p:cNvPr id="31" name="Shape 29"/>
           <p:cNvSpPr/>
           <p:nvPr/>
         </p:nvSpPr>
@@ -16015,7 +17263,7 @@
       </p:sp>
       <p:sp>
         <p:nvSpPr>
-          <p:cNvPr id="30" name="Text 28"/>
+          <p:cNvPr id="32" name="Text 30"/>
           <p:cNvSpPr/>
           <p:nvPr/>
         </p:nvSpPr>
@@ -16054,7 +17302,7 @@
       </p:sp>
       <p:sp>
         <p:nvSpPr>
-          <p:cNvPr id="31" name="Text 29"/>
+          <p:cNvPr id="33" name="Text 31"/>
           <p:cNvSpPr/>
           <p:nvPr/>
         </p:nvSpPr>
@@ -16228,7 +17476,85 @@
       </p:sp>
       <p:sp>
         <p:nvSpPr>
-          <p:cNvPr id="5" name="Shape 3"/>
+          <p:cNvPr id="5" name="Text 3"/>
+          <p:cNvSpPr/>
+          <p:nvPr/>
+        </p:nvSpPr>
+        <p:spPr>
+          <a:xfrm>
+            <a:off x="411480" y="18288"/>
+            <a:ext cx="5852160" cy="146304"/>
+          </a:xfrm>
+          <a:prstGeom prst="rect">
+            <a:avLst/>
+          </a:prstGeom>
+          <a:noFill/>
+          <a:ln/>
+        </p:spPr>
+        <p:txBody>
+          <a:bodyPr wrap="square" lIns="0" tIns="0" rIns="0" bIns="0" rtlCol="0" anchor="ctr"/>
+          <a:lstStyle/>
+          <a:p>
+            <a:pPr indent="0" marL="0">
+              <a:buNone/>
+            </a:pPr>
+            <a:r>
+              <a:rPr lang="en-US" sz="800" b="1" dirty="0">
+                <a:solidFill>
+                  <a:srgbClr val="FECACA"/>
+                </a:solidFill>
+                <a:latin typeface="Calibri" pitchFamily="34" charset="0"/>
+                <a:ea typeface="Calibri" pitchFamily="34" charset="-122"/>
+                <a:cs typeface="Calibri" pitchFamily="34" charset="-120"/>
+              </a:rPr>
+              <a:t>LOCKHEED MARTIN PROPRIETARY INFORMATION</a:t>
+            </a:r>
+            <a:endParaRPr lang="en-US" sz="800" dirty="0"/>
+          </a:p>
+        </p:txBody>
+      </p:sp>
+      <p:sp>
+        <p:nvSpPr>
+          <p:cNvPr id="6" name="Text 4"/>
+          <p:cNvSpPr/>
+          <p:nvPr/>
+        </p:nvSpPr>
+        <p:spPr>
+          <a:xfrm>
+            <a:off x="411480" y="4919472"/>
+            <a:ext cx="7680960" cy="182880"/>
+          </a:xfrm>
+          <a:prstGeom prst="rect">
+            <a:avLst/>
+          </a:prstGeom>
+          <a:noFill/>
+          <a:ln/>
+        </p:spPr>
+        <p:txBody>
+          <a:bodyPr wrap="square" lIns="0" tIns="0" rIns="0" bIns="0" rtlCol="0" anchor="ctr"/>
+          <a:lstStyle/>
+          <a:p>
+            <a:pPr indent="0" marL="0">
+              <a:buNone/>
+            </a:pPr>
+            <a:r>
+              <a:rPr lang="en-US" sz="900" dirty="0">
+                <a:solidFill>
+                  <a:srgbClr val="94A3B8"/>
+                </a:solidFill>
+                <a:latin typeface="Calibri" pitchFamily="34" charset="0"/>
+                <a:ea typeface="Calibri" pitchFamily="34" charset="-122"/>
+                <a:cs typeface="Calibri" pitchFamily="34" charset="-120"/>
+              </a:rPr>
+              <a:t>Thomas Rathbun, PhD  ·  LOCKHEED MARTIN PROPRIETARY INFORMATION</a:t>
+            </a:r>
+            <a:endParaRPr lang="en-US" sz="900" dirty="0"/>
+          </a:p>
+        </p:txBody>
+      </p:sp>
+      <p:sp>
+        <p:nvSpPr>
+          <p:cNvPr id="7" name="Shape 5"/>
           <p:cNvSpPr/>
           <p:nvPr/>
         </p:nvSpPr>
@@ -16255,7 +17581,7 @@
       </p:sp>
       <p:sp>
         <p:nvSpPr>
-          <p:cNvPr id="6" name="Shape 4"/>
+          <p:cNvPr id="8" name="Shape 6"/>
           <p:cNvSpPr/>
           <p:nvPr/>
         </p:nvSpPr>
@@ -16280,7 +17606,7 @@
       </p:sp>
       <p:sp>
         <p:nvSpPr>
-          <p:cNvPr id="7" name="Text 5"/>
+          <p:cNvPr id="9" name="Text 7"/>
           <p:cNvSpPr/>
           <p:nvPr/>
         </p:nvSpPr>
@@ -16319,7 +17645,7 @@
       </p:sp>
       <p:sp>
         <p:nvSpPr>
-          <p:cNvPr id="8" name="Text 6"/>
+          <p:cNvPr id="10" name="Text 8"/>
           <p:cNvSpPr/>
           <p:nvPr/>
         </p:nvSpPr>
@@ -16358,7 +17684,7 @@
       </p:sp>
       <p:sp>
         <p:nvSpPr>
-          <p:cNvPr id="9" name="Text 7"/>
+          <p:cNvPr id="11" name="Text 9"/>
           <p:cNvSpPr/>
           <p:nvPr/>
         </p:nvSpPr>
@@ -16397,7 +17723,7 @@
       </p:sp>
       <p:sp>
         <p:nvSpPr>
-          <p:cNvPr id="10" name="Shape 8"/>
+          <p:cNvPr id="12" name="Shape 10"/>
           <p:cNvSpPr/>
           <p:nvPr/>
         </p:nvSpPr>
@@ -16424,7 +17750,7 @@
       </p:sp>
       <p:sp>
         <p:nvSpPr>
-          <p:cNvPr id="11" name="Shape 9"/>
+          <p:cNvPr id="13" name="Shape 11"/>
           <p:cNvSpPr/>
           <p:nvPr/>
         </p:nvSpPr>
@@ -16449,7 +17775,7 @@
       </p:sp>
       <p:sp>
         <p:nvSpPr>
-          <p:cNvPr id="12" name="Text 10"/>
+          <p:cNvPr id="14" name="Text 12"/>
           <p:cNvSpPr/>
           <p:nvPr/>
         </p:nvSpPr>
@@ -16488,7 +17814,7 @@
       </p:sp>
       <p:sp>
         <p:nvSpPr>
-          <p:cNvPr id="13" name="Text 11"/>
+          <p:cNvPr id="15" name="Text 13"/>
           <p:cNvSpPr/>
           <p:nvPr/>
         </p:nvSpPr>
@@ -16527,7 +17853,7 @@
       </p:sp>
       <p:sp>
         <p:nvSpPr>
-          <p:cNvPr id="14" name="Text 12"/>
+          <p:cNvPr id="16" name="Text 14"/>
           <p:cNvSpPr/>
           <p:nvPr/>
         </p:nvSpPr>
@@ -16566,7 +17892,7 @@
       </p:sp>
       <p:sp>
         <p:nvSpPr>
-          <p:cNvPr id="15" name="Shape 13"/>
+          <p:cNvPr id="17" name="Shape 15"/>
           <p:cNvSpPr/>
           <p:nvPr/>
         </p:nvSpPr>
@@ -16593,7 +17919,7 @@
       </p:sp>
       <p:sp>
         <p:nvSpPr>
-          <p:cNvPr id="16" name="Shape 14"/>
+          <p:cNvPr id="18" name="Shape 16"/>
           <p:cNvSpPr/>
           <p:nvPr/>
         </p:nvSpPr>
@@ -16618,7 +17944,7 @@
       </p:sp>
       <p:sp>
         <p:nvSpPr>
-          <p:cNvPr id="17" name="Text 15"/>
+          <p:cNvPr id="19" name="Text 17"/>
           <p:cNvSpPr/>
           <p:nvPr/>
         </p:nvSpPr>
@@ -16657,7 +17983,7 @@
       </p:sp>
       <p:sp>
         <p:nvSpPr>
-          <p:cNvPr id="18" name="Text 16"/>
+          <p:cNvPr id="20" name="Text 18"/>
           <p:cNvSpPr/>
           <p:nvPr/>
         </p:nvSpPr>
@@ -16696,7 +18022,7 @@
       </p:sp>
       <p:sp>
         <p:nvSpPr>
-          <p:cNvPr id="19" name="Text 17"/>
+          <p:cNvPr id="21" name="Text 19"/>
           <p:cNvSpPr/>
           <p:nvPr/>
         </p:nvSpPr>
@@ -16735,7 +18061,7 @@
       </p:sp>
       <p:sp>
         <p:nvSpPr>
-          <p:cNvPr id="20" name="Shape 18"/>
+          <p:cNvPr id="22" name="Shape 20"/>
           <p:cNvSpPr/>
           <p:nvPr/>
         </p:nvSpPr>
@@ -16762,7 +18088,7 @@
       </p:sp>
       <p:sp>
         <p:nvSpPr>
-          <p:cNvPr id="21" name="Shape 19"/>
+          <p:cNvPr id="23" name="Shape 21"/>
           <p:cNvSpPr/>
           <p:nvPr/>
         </p:nvSpPr>
@@ -16787,7 +18113,7 @@
       </p:sp>
       <p:sp>
         <p:nvSpPr>
-          <p:cNvPr id="22" name="Text 20"/>
+          <p:cNvPr id="24" name="Text 22"/>
           <p:cNvSpPr/>
           <p:nvPr/>
         </p:nvSpPr>
@@ -16826,7 +18152,7 @@
       </p:sp>
       <p:sp>
         <p:nvSpPr>
-          <p:cNvPr id="23" name="Text 21"/>
+          <p:cNvPr id="25" name="Text 23"/>
           <p:cNvSpPr/>
           <p:nvPr/>
         </p:nvSpPr>
@@ -16865,7 +18191,7 @@
       </p:sp>
       <p:sp>
         <p:nvSpPr>
-          <p:cNvPr id="24" name="Text 22"/>
+          <p:cNvPr id="26" name="Text 24"/>
           <p:cNvSpPr/>
           <p:nvPr/>
         </p:nvSpPr>
@@ -16904,7 +18230,7 @@
       </p:sp>
       <p:sp>
         <p:nvSpPr>
-          <p:cNvPr id="25" name="Shape 23"/>
+          <p:cNvPr id="27" name="Shape 25"/>
           <p:cNvSpPr/>
           <p:nvPr/>
         </p:nvSpPr>
@@ -16931,7 +18257,7 @@
       </p:sp>
       <p:sp>
         <p:nvSpPr>
-          <p:cNvPr id="26" name="Shape 24"/>
+          <p:cNvPr id="28" name="Shape 26"/>
           <p:cNvSpPr/>
           <p:nvPr/>
         </p:nvSpPr>
@@ -16956,7 +18282,7 @@
       </p:sp>
       <p:sp>
         <p:nvSpPr>
-          <p:cNvPr id="27" name="Text 25"/>
+          <p:cNvPr id="29" name="Text 27"/>
           <p:cNvSpPr/>
           <p:nvPr/>
         </p:nvSpPr>
@@ -16995,7 +18321,7 @@
       </p:sp>
       <p:sp>
         <p:nvSpPr>
-          <p:cNvPr id="28" name="Text 26"/>
+          <p:cNvPr id="30" name="Text 28"/>
           <p:cNvSpPr/>
           <p:nvPr/>
         </p:nvSpPr>
@@ -17034,7 +18360,7 @@
       </p:sp>
       <p:sp>
         <p:nvSpPr>
-          <p:cNvPr id="29" name="Text 27"/>
+          <p:cNvPr id="31" name="Text 29"/>
           <p:cNvSpPr/>
           <p:nvPr/>
         </p:nvSpPr>
@@ -17208,7 +18534,85 @@
       </p:sp>
       <p:sp>
         <p:nvSpPr>
-          <p:cNvPr id="5" name="Shape 3"/>
+          <p:cNvPr id="5" name="Text 3"/>
+          <p:cNvSpPr/>
+          <p:nvPr/>
+        </p:nvSpPr>
+        <p:spPr>
+          <a:xfrm>
+            <a:off x="411480" y="18288"/>
+            <a:ext cx="5852160" cy="146304"/>
+          </a:xfrm>
+          <a:prstGeom prst="rect">
+            <a:avLst/>
+          </a:prstGeom>
+          <a:noFill/>
+          <a:ln/>
+        </p:spPr>
+        <p:txBody>
+          <a:bodyPr wrap="square" lIns="0" tIns="0" rIns="0" bIns="0" rtlCol="0" anchor="ctr"/>
+          <a:lstStyle/>
+          <a:p>
+            <a:pPr indent="0" marL="0">
+              <a:buNone/>
+            </a:pPr>
+            <a:r>
+              <a:rPr lang="en-US" sz="800" b="1" dirty="0">
+                <a:solidFill>
+                  <a:srgbClr val="FECACA"/>
+                </a:solidFill>
+                <a:latin typeface="Calibri" pitchFamily="34" charset="0"/>
+                <a:ea typeface="Calibri" pitchFamily="34" charset="-122"/>
+                <a:cs typeface="Calibri" pitchFamily="34" charset="-120"/>
+              </a:rPr>
+              <a:t>LOCKHEED MARTIN PROPRIETARY INFORMATION</a:t>
+            </a:r>
+            <a:endParaRPr lang="en-US" sz="800" dirty="0"/>
+          </a:p>
+        </p:txBody>
+      </p:sp>
+      <p:sp>
+        <p:nvSpPr>
+          <p:cNvPr id="6" name="Text 4"/>
+          <p:cNvSpPr/>
+          <p:nvPr/>
+        </p:nvSpPr>
+        <p:spPr>
+          <a:xfrm>
+            <a:off x="411480" y="4919472"/>
+            <a:ext cx="7680960" cy="182880"/>
+          </a:xfrm>
+          <a:prstGeom prst="rect">
+            <a:avLst/>
+          </a:prstGeom>
+          <a:noFill/>
+          <a:ln/>
+        </p:spPr>
+        <p:txBody>
+          <a:bodyPr wrap="square" lIns="0" tIns="0" rIns="0" bIns="0" rtlCol="0" anchor="ctr"/>
+          <a:lstStyle/>
+          <a:p>
+            <a:pPr indent="0" marL="0">
+              <a:buNone/>
+            </a:pPr>
+            <a:r>
+              <a:rPr lang="en-US" sz="900" dirty="0">
+                <a:solidFill>
+                  <a:srgbClr val="94A3B8"/>
+                </a:solidFill>
+                <a:latin typeface="Calibri" pitchFamily="34" charset="0"/>
+                <a:ea typeface="Calibri" pitchFamily="34" charset="-122"/>
+                <a:cs typeface="Calibri" pitchFamily="34" charset="-120"/>
+              </a:rPr>
+              <a:t>Thomas Rathbun, PhD  ·  LOCKHEED MARTIN PROPRIETARY INFORMATION</a:t>
+            </a:r>
+            <a:endParaRPr lang="en-US" sz="900" dirty="0"/>
+          </a:p>
+        </p:txBody>
+      </p:sp>
+      <p:sp>
+        <p:nvSpPr>
+          <p:cNvPr id="7" name="Shape 5"/>
           <p:cNvSpPr/>
           <p:nvPr/>
         </p:nvSpPr>
@@ -17235,7 +18639,7 @@
       </p:sp>
       <p:sp>
         <p:nvSpPr>
-          <p:cNvPr id="6" name="Text 4"/>
+          <p:cNvPr id="8" name="Text 6"/>
           <p:cNvSpPr/>
           <p:nvPr/>
         </p:nvSpPr>
@@ -17274,7 +18678,7 @@
       </p:sp>
       <p:sp>
         <p:nvSpPr>
-          <p:cNvPr id="7" name="Text 5"/>
+          <p:cNvPr id="9" name="Text 7"/>
           <p:cNvSpPr/>
           <p:nvPr/>
         </p:nvSpPr>
@@ -17313,7 +18717,7 @@
       </p:sp>
       <p:sp>
         <p:nvSpPr>
-          <p:cNvPr id="8" name="Shape 6"/>
+          <p:cNvPr id="10" name="Shape 8"/>
           <p:cNvSpPr/>
           <p:nvPr/>
         </p:nvSpPr>
@@ -17340,7 +18744,7 @@
       </p:sp>
       <p:sp>
         <p:nvSpPr>
-          <p:cNvPr id="9" name="Text 7"/>
+          <p:cNvPr id="11" name="Text 9"/>
           <p:cNvSpPr/>
           <p:nvPr/>
         </p:nvSpPr>
@@ -17379,7 +18783,7 @@
       </p:sp>
       <p:sp>
         <p:nvSpPr>
-          <p:cNvPr id="10" name="Text 8"/>
+          <p:cNvPr id="12" name="Text 10"/>
           <p:cNvSpPr/>
           <p:nvPr/>
         </p:nvSpPr>
@@ -17418,7 +18822,7 @@
       </p:sp>
       <p:sp>
         <p:nvSpPr>
-          <p:cNvPr id="11" name="Shape 9"/>
+          <p:cNvPr id="13" name="Shape 11"/>
           <p:cNvSpPr/>
           <p:nvPr/>
         </p:nvSpPr>
@@ -17445,7 +18849,7 @@
       </p:sp>
       <p:sp>
         <p:nvSpPr>
-          <p:cNvPr id="12" name="Text 10"/>
+          <p:cNvPr id="14" name="Text 12"/>
           <p:cNvSpPr/>
           <p:nvPr/>
         </p:nvSpPr>
@@ -17484,7 +18888,7 @@
       </p:sp>
       <p:sp>
         <p:nvSpPr>
-          <p:cNvPr id="13" name="Text 11"/>
+          <p:cNvPr id="15" name="Text 13"/>
           <p:cNvSpPr/>
           <p:nvPr/>
         </p:nvSpPr>
@@ -17523,7 +18927,7 @@
       </p:sp>
       <p:sp>
         <p:nvSpPr>
-          <p:cNvPr id="14" name="Shape 12"/>
+          <p:cNvPr id="16" name="Shape 14"/>
           <p:cNvSpPr/>
           <p:nvPr/>
         </p:nvSpPr>
@@ -17550,7 +18954,7 @@
       </p:sp>
       <p:sp>
         <p:nvSpPr>
-          <p:cNvPr id="15" name="Text 13"/>
+          <p:cNvPr id="17" name="Text 15"/>
           <p:cNvSpPr/>
           <p:nvPr/>
         </p:nvSpPr>
@@ -17589,7 +18993,7 @@
       </p:sp>
       <p:sp>
         <p:nvSpPr>
-          <p:cNvPr id="16" name="Text 14"/>
+          <p:cNvPr id="18" name="Text 16"/>
           <p:cNvSpPr/>
           <p:nvPr/>
         </p:nvSpPr>
@@ -17628,7 +19032,7 @@
       </p:sp>
       <p:sp>
         <p:nvSpPr>
-          <p:cNvPr id="17" name="Shape 15"/>
+          <p:cNvPr id="19" name="Shape 17"/>
           <p:cNvSpPr/>
           <p:nvPr/>
         </p:nvSpPr>
@@ -17655,7 +19059,7 @@
       </p:sp>
       <p:sp>
         <p:nvSpPr>
-          <p:cNvPr id="18" name="Text 16"/>
+          <p:cNvPr id="20" name="Text 18"/>
           <p:cNvSpPr/>
           <p:nvPr/>
         </p:nvSpPr>
@@ -17694,7 +19098,7 @@
       </p:sp>
       <p:sp>
         <p:nvSpPr>
-          <p:cNvPr id="19" name="Text 17"/>
+          <p:cNvPr id="21" name="Text 19"/>
           <p:cNvSpPr/>
           <p:nvPr/>
         </p:nvSpPr>
@@ -17733,7 +19137,7 @@
       </p:sp>
       <p:sp>
         <p:nvSpPr>
-          <p:cNvPr id="20" name="Shape 18"/>
+          <p:cNvPr id="22" name="Shape 20"/>
           <p:cNvSpPr/>
           <p:nvPr/>
         </p:nvSpPr>
@@ -17760,7 +19164,7 @@
       </p:sp>
       <p:sp>
         <p:nvSpPr>
-          <p:cNvPr id="21" name="Text 19"/>
+          <p:cNvPr id="23" name="Text 21"/>
           <p:cNvSpPr/>
           <p:nvPr/>
         </p:nvSpPr>
@@ -17799,7 +19203,7 @@
       </p:sp>
       <p:sp>
         <p:nvSpPr>
-          <p:cNvPr id="22" name="Text 20"/>
+          <p:cNvPr id="24" name="Text 22"/>
           <p:cNvSpPr/>
           <p:nvPr/>
         </p:nvSpPr>
@@ -17838,7 +19242,7 @@
       </p:sp>
       <p:sp>
         <p:nvSpPr>
-          <p:cNvPr id="23" name="Shape 21"/>
+          <p:cNvPr id="25" name="Shape 23"/>
           <p:cNvSpPr/>
           <p:nvPr/>
         </p:nvSpPr>
@@ -17865,7 +19269,7 @@
       </p:sp>
       <p:sp>
         <p:nvSpPr>
-          <p:cNvPr id="24" name="Text 22"/>
+          <p:cNvPr id="26" name="Text 24"/>
           <p:cNvSpPr/>
           <p:nvPr/>
         </p:nvSpPr>
@@ -17904,7 +19308,7 @@
       </p:sp>
       <p:sp>
         <p:nvSpPr>
-          <p:cNvPr id="25" name="Text 23"/>
+          <p:cNvPr id="27" name="Text 25"/>
           <p:cNvSpPr/>
           <p:nvPr/>
         </p:nvSpPr>
@@ -17943,7 +19347,7 @@
       </p:sp>
       <p:sp>
         <p:nvSpPr>
-          <p:cNvPr id="26" name="Shape 24"/>
+          <p:cNvPr id="28" name="Shape 26"/>
           <p:cNvSpPr/>
           <p:nvPr/>
         </p:nvSpPr>
@@ -17970,7 +19374,7 @@
       </p:sp>
       <p:sp>
         <p:nvSpPr>
-          <p:cNvPr id="27" name="Text 25"/>
+          <p:cNvPr id="29" name="Text 27"/>
           <p:cNvSpPr/>
           <p:nvPr/>
         </p:nvSpPr>
@@ -18009,7 +19413,7 @@
       </p:sp>
       <p:sp>
         <p:nvSpPr>
-          <p:cNvPr id="28" name="Text 26"/>
+          <p:cNvPr id="30" name="Text 28"/>
           <p:cNvSpPr/>
           <p:nvPr/>
         </p:nvSpPr>
@@ -18048,7 +19452,7 @@
       </p:sp>
       <p:sp>
         <p:nvSpPr>
-          <p:cNvPr id="29" name="Shape 27"/>
+          <p:cNvPr id="31" name="Shape 29"/>
           <p:cNvSpPr/>
           <p:nvPr/>
         </p:nvSpPr>
@@ -18075,7 +19479,7 @@
       </p:sp>
       <p:sp>
         <p:nvSpPr>
-          <p:cNvPr id="30" name="Text 28"/>
+          <p:cNvPr id="32" name="Text 30"/>
           <p:cNvSpPr/>
           <p:nvPr/>
         </p:nvSpPr>
@@ -18114,7 +19518,7 @@
       </p:sp>
       <p:sp>
         <p:nvSpPr>
-          <p:cNvPr id="31" name="Text 29"/>
+          <p:cNvPr id="33" name="Text 31"/>
           <p:cNvSpPr/>
           <p:nvPr/>
         </p:nvSpPr>
@@ -18153,7 +19557,7 @@
       </p:sp>
       <p:sp>
         <p:nvSpPr>
-          <p:cNvPr id="32" name="Shape 30"/>
+          <p:cNvPr id="34" name="Shape 32"/>
           <p:cNvSpPr/>
           <p:nvPr/>
         </p:nvSpPr>
@@ -18180,7 +19584,7 @@
       </p:sp>
       <p:sp>
         <p:nvSpPr>
-          <p:cNvPr id="33" name="Text 31"/>
+          <p:cNvPr id="35" name="Text 33"/>
           <p:cNvSpPr/>
           <p:nvPr/>
         </p:nvSpPr>
@@ -18219,7 +19623,7 @@
       </p:sp>
       <p:sp>
         <p:nvSpPr>
-          <p:cNvPr id="34" name="Text 32"/>
+          <p:cNvPr id="36" name="Text 34"/>
           <p:cNvSpPr/>
           <p:nvPr/>
         </p:nvSpPr>
@@ -18399,6 +19803,84 @@
         </p:nvSpPr>
         <p:spPr>
           <a:xfrm>
+            <a:off x="411480" y="18288"/>
+            <a:ext cx="5852160" cy="146304"/>
+          </a:xfrm>
+          <a:prstGeom prst="rect">
+            <a:avLst/>
+          </a:prstGeom>
+          <a:noFill/>
+          <a:ln/>
+        </p:spPr>
+        <p:txBody>
+          <a:bodyPr wrap="square" lIns="0" tIns="0" rIns="0" bIns="0" rtlCol="0" anchor="ctr"/>
+          <a:lstStyle/>
+          <a:p>
+            <a:pPr indent="0" marL="0">
+              <a:buNone/>
+            </a:pPr>
+            <a:r>
+              <a:rPr lang="en-US" sz="800" b="1" dirty="0">
+                <a:solidFill>
+                  <a:srgbClr val="FECACA"/>
+                </a:solidFill>
+                <a:latin typeface="Calibri" pitchFamily="34" charset="0"/>
+                <a:ea typeface="Calibri" pitchFamily="34" charset="-122"/>
+                <a:cs typeface="Calibri" pitchFamily="34" charset="-120"/>
+              </a:rPr>
+              <a:t>LOCKHEED MARTIN PROPRIETARY INFORMATION</a:t>
+            </a:r>
+            <a:endParaRPr lang="en-US" sz="800" dirty="0"/>
+          </a:p>
+        </p:txBody>
+      </p:sp>
+      <p:sp>
+        <p:nvSpPr>
+          <p:cNvPr id="6" name="Text 4"/>
+          <p:cNvSpPr/>
+          <p:nvPr/>
+        </p:nvSpPr>
+        <p:spPr>
+          <a:xfrm>
+            <a:off x="411480" y="4919472"/>
+            <a:ext cx="7680960" cy="182880"/>
+          </a:xfrm>
+          <a:prstGeom prst="rect">
+            <a:avLst/>
+          </a:prstGeom>
+          <a:noFill/>
+          <a:ln/>
+        </p:spPr>
+        <p:txBody>
+          <a:bodyPr wrap="square" lIns="0" tIns="0" rIns="0" bIns="0" rtlCol="0" anchor="ctr"/>
+          <a:lstStyle/>
+          <a:p>
+            <a:pPr indent="0" marL="0">
+              <a:buNone/>
+            </a:pPr>
+            <a:r>
+              <a:rPr lang="en-US" sz="900" dirty="0">
+                <a:solidFill>
+                  <a:srgbClr val="94A3B8"/>
+                </a:solidFill>
+                <a:latin typeface="Calibri" pitchFamily="34" charset="0"/>
+                <a:ea typeface="Calibri" pitchFamily="34" charset="-122"/>
+                <a:cs typeface="Calibri" pitchFamily="34" charset="-120"/>
+              </a:rPr>
+              <a:t>Thomas Rathbun, PhD  ·  LOCKHEED MARTIN PROPRIETARY INFORMATION</a:t>
+            </a:r>
+            <a:endParaRPr lang="en-US" sz="900" dirty="0"/>
+          </a:p>
+        </p:txBody>
+      </p:sp>
+      <p:sp>
+        <p:nvSpPr>
+          <p:cNvPr id="7" name="Text 5"/>
+          <p:cNvSpPr/>
+          <p:nvPr/>
+        </p:nvSpPr>
+        <p:spPr>
+          <a:xfrm>
             <a:off x="411480" y="960120"/>
             <a:ext cx="8321040" cy="274320"/>
           </a:xfrm>
@@ -18432,7 +19914,7 @@
       </p:sp>
       <p:sp>
         <p:nvSpPr>
-          <p:cNvPr id="6" name="Shape 4"/>
+          <p:cNvPr id="8" name="Shape 6"/>
           <p:cNvSpPr/>
           <p:nvPr/>
         </p:nvSpPr>
@@ -18459,7 +19941,7 @@
       </p:sp>
       <p:sp>
         <p:nvSpPr>
-          <p:cNvPr id="7" name="Shape 5"/>
+          <p:cNvPr id="9" name="Shape 7"/>
           <p:cNvSpPr/>
           <p:nvPr/>
         </p:nvSpPr>
@@ -18484,7 +19966,7 @@
       </p:sp>
       <p:sp>
         <p:nvSpPr>
-          <p:cNvPr id="8" name="Text 6"/>
+          <p:cNvPr id="10" name="Text 8"/>
           <p:cNvSpPr/>
           <p:nvPr/>
         </p:nvSpPr>
@@ -18523,7 +20005,7 @@
       </p:sp>
       <p:sp>
         <p:nvSpPr>
-          <p:cNvPr id="9" name="Text 7"/>
+          <p:cNvPr id="11" name="Text 9"/>
           <p:cNvSpPr/>
           <p:nvPr/>
         </p:nvSpPr>
@@ -18562,7 +20044,7 @@
       </p:sp>
       <p:sp>
         <p:nvSpPr>
-          <p:cNvPr id="10" name="Text 8"/>
+          <p:cNvPr id="12" name="Text 10"/>
           <p:cNvSpPr/>
           <p:nvPr/>
         </p:nvSpPr>
@@ -18601,7 +20083,7 @@
       </p:sp>
       <p:sp>
         <p:nvSpPr>
-          <p:cNvPr id="11" name="Shape 9"/>
+          <p:cNvPr id="13" name="Shape 11"/>
           <p:cNvSpPr/>
           <p:nvPr/>
         </p:nvSpPr>
@@ -18628,7 +20110,7 @@
       </p:sp>
       <p:sp>
         <p:nvSpPr>
-          <p:cNvPr id="12" name="Shape 10"/>
+          <p:cNvPr id="14" name="Shape 12"/>
           <p:cNvSpPr/>
           <p:nvPr/>
         </p:nvSpPr>
@@ -18653,7 +20135,7 @@
       </p:sp>
       <p:sp>
         <p:nvSpPr>
-          <p:cNvPr id="13" name="Text 11"/>
+          <p:cNvPr id="15" name="Text 13"/>
           <p:cNvSpPr/>
           <p:nvPr/>
         </p:nvSpPr>
@@ -18692,7 +20174,7 @@
       </p:sp>
       <p:sp>
         <p:nvSpPr>
-          <p:cNvPr id="14" name="Text 12"/>
+          <p:cNvPr id="16" name="Text 14"/>
           <p:cNvSpPr/>
           <p:nvPr/>
         </p:nvSpPr>
@@ -18731,7 +20213,7 @@
       </p:sp>
       <p:sp>
         <p:nvSpPr>
-          <p:cNvPr id="15" name="Text 13"/>
+          <p:cNvPr id="17" name="Text 15"/>
           <p:cNvSpPr/>
           <p:nvPr/>
         </p:nvSpPr>
@@ -18770,7 +20252,7 @@
       </p:sp>
       <p:sp>
         <p:nvSpPr>
-          <p:cNvPr id="16" name="Shape 14"/>
+          <p:cNvPr id="18" name="Shape 16"/>
           <p:cNvSpPr/>
           <p:nvPr/>
         </p:nvSpPr>
@@ -18797,7 +20279,7 @@
       </p:sp>
       <p:sp>
         <p:nvSpPr>
-          <p:cNvPr id="17" name="Shape 15"/>
+          <p:cNvPr id="19" name="Shape 17"/>
           <p:cNvSpPr/>
           <p:nvPr/>
         </p:nvSpPr>
@@ -18822,7 +20304,7 @@
       </p:sp>
       <p:sp>
         <p:nvSpPr>
-          <p:cNvPr id="18" name="Text 16"/>
+          <p:cNvPr id="20" name="Text 18"/>
           <p:cNvSpPr/>
           <p:nvPr/>
         </p:nvSpPr>
@@ -18861,7 +20343,7 @@
       </p:sp>
       <p:sp>
         <p:nvSpPr>
-          <p:cNvPr id="19" name="Text 17"/>
+          <p:cNvPr id="21" name="Text 19"/>
           <p:cNvSpPr/>
           <p:nvPr/>
         </p:nvSpPr>
@@ -18900,7 +20382,7 @@
       </p:sp>
       <p:sp>
         <p:nvSpPr>
-          <p:cNvPr id="20" name="Text 18"/>
+          <p:cNvPr id="22" name="Text 20"/>
           <p:cNvSpPr/>
           <p:nvPr/>
         </p:nvSpPr>
@@ -18939,7 +20421,7 @@
       </p:sp>
       <p:sp>
         <p:nvSpPr>
-          <p:cNvPr id="21" name="Shape 19"/>
+          <p:cNvPr id="23" name="Shape 21"/>
           <p:cNvSpPr/>
           <p:nvPr/>
         </p:nvSpPr>
@@ -18966,7 +20448,7 @@
       </p:sp>
       <p:sp>
         <p:nvSpPr>
-          <p:cNvPr id="22" name="Shape 20"/>
+          <p:cNvPr id="24" name="Shape 22"/>
           <p:cNvSpPr/>
           <p:nvPr/>
         </p:nvSpPr>
@@ -18991,7 +20473,7 @@
       </p:sp>
       <p:sp>
         <p:nvSpPr>
-          <p:cNvPr id="23" name="Text 21"/>
+          <p:cNvPr id="25" name="Text 23"/>
           <p:cNvSpPr/>
           <p:nvPr/>
         </p:nvSpPr>
@@ -19030,7 +20512,7 @@
       </p:sp>
       <p:sp>
         <p:nvSpPr>
-          <p:cNvPr id="24" name="Text 22"/>
+          <p:cNvPr id="26" name="Text 24"/>
           <p:cNvSpPr/>
           <p:nvPr/>
         </p:nvSpPr>
@@ -19069,7 +20551,7 @@
       </p:sp>
       <p:sp>
         <p:nvSpPr>
-          <p:cNvPr id="25" name="Text 23"/>
+          <p:cNvPr id="27" name="Text 25"/>
           <p:cNvSpPr/>
           <p:nvPr/>
         </p:nvSpPr>
@@ -19243,7 +20725,85 @@
       </p:sp>
       <p:sp>
         <p:nvSpPr>
-          <p:cNvPr id="5" name="Shape 3"/>
+          <p:cNvPr id="5" name="Text 3"/>
+          <p:cNvSpPr/>
+          <p:nvPr/>
+        </p:nvSpPr>
+        <p:spPr>
+          <a:xfrm>
+            <a:off x="411480" y="18288"/>
+            <a:ext cx="5852160" cy="146304"/>
+          </a:xfrm>
+          <a:prstGeom prst="rect">
+            <a:avLst/>
+          </a:prstGeom>
+          <a:noFill/>
+          <a:ln/>
+        </p:spPr>
+        <p:txBody>
+          <a:bodyPr wrap="square" lIns="0" tIns="0" rIns="0" bIns="0" rtlCol="0" anchor="ctr"/>
+          <a:lstStyle/>
+          <a:p>
+            <a:pPr indent="0" marL="0">
+              <a:buNone/>
+            </a:pPr>
+            <a:r>
+              <a:rPr lang="en-US" sz="800" b="1" dirty="0">
+                <a:solidFill>
+                  <a:srgbClr val="FECACA"/>
+                </a:solidFill>
+                <a:latin typeface="Calibri" pitchFamily="34" charset="0"/>
+                <a:ea typeface="Calibri" pitchFamily="34" charset="-122"/>
+                <a:cs typeface="Calibri" pitchFamily="34" charset="-120"/>
+              </a:rPr>
+              <a:t>LOCKHEED MARTIN PROPRIETARY INFORMATION</a:t>
+            </a:r>
+            <a:endParaRPr lang="en-US" sz="800" dirty="0"/>
+          </a:p>
+        </p:txBody>
+      </p:sp>
+      <p:sp>
+        <p:nvSpPr>
+          <p:cNvPr id="6" name="Text 4"/>
+          <p:cNvSpPr/>
+          <p:nvPr/>
+        </p:nvSpPr>
+        <p:spPr>
+          <a:xfrm>
+            <a:off x="411480" y="4919472"/>
+            <a:ext cx="7680960" cy="182880"/>
+          </a:xfrm>
+          <a:prstGeom prst="rect">
+            <a:avLst/>
+          </a:prstGeom>
+          <a:noFill/>
+          <a:ln/>
+        </p:spPr>
+        <p:txBody>
+          <a:bodyPr wrap="square" lIns="0" tIns="0" rIns="0" bIns="0" rtlCol="0" anchor="ctr"/>
+          <a:lstStyle/>
+          <a:p>
+            <a:pPr indent="0" marL="0">
+              <a:buNone/>
+            </a:pPr>
+            <a:r>
+              <a:rPr lang="en-US" sz="900" dirty="0">
+                <a:solidFill>
+                  <a:srgbClr val="94A3B8"/>
+                </a:solidFill>
+                <a:latin typeface="Calibri" pitchFamily="34" charset="0"/>
+                <a:ea typeface="Calibri" pitchFamily="34" charset="-122"/>
+                <a:cs typeface="Calibri" pitchFamily="34" charset="-120"/>
+              </a:rPr>
+              <a:t>Thomas Rathbun, PhD  ·  LOCKHEED MARTIN PROPRIETARY INFORMATION</a:t>
+            </a:r>
+            <a:endParaRPr lang="en-US" sz="900" dirty="0"/>
+          </a:p>
+        </p:txBody>
+      </p:sp>
+      <p:sp>
+        <p:nvSpPr>
+          <p:cNvPr id="7" name="Shape 5"/>
           <p:cNvSpPr/>
           <p:nvPr/>
         </p:nvSpPr>
@@ -19270,7 +20830,7 @@
       </p:sp>
       <p:sp>
         <p:nvSpPr>
-          <p:cNvPr id="6" name="Shape 4"/>
+          <p:cNvPr id="8" name="Shape 6"/>
           <p:cNvSpPr/>
           <p:nvPr/>
         </p:nvSpPr>
@@ -19295,7 +20855,7 @@
       </p:sp>
       <p:sp>
         <p:nvSpPr>
-          <p:cNvPr id="7" name="Text 5"/>
+          <p:cNvPr id="9" name="Text 7"/>
           <p:cNvSpPr/>
           <p:nvPr/>
         </p:nvSpPr>
@@ -19334,7 +20894,7 @@
       </p:sp>
       <p:sp>
         <p:nvSpPr>
-          <p:cNvPr id="8" name="Text 6"/>
+          <p:cNvPr id="10" name="Text 8"/>
           <p:cNvSpPr/>
           <p:nvPr/>
         </p:nvSpPr>
@@ -19373,7 +20933,7 @@
       </p:sp>
       <p:sp>
         <p:nvSpPr>
-          <p:cNvPr id="9" name="Text 7"/>
+          <p:cNvPr id="11" name="Text 9"/>
           <p:cNvSpPr/>
           <p:nvPr/>
         </p:nvSpPr>
@@ -19412,7 +20972,7 @@
       </p:sp>
       <p:sp>
         <p:nvSpPr>
-          <p:cNvPr id="10" name="Text 8"/>
+          <p:cNvPr id="12" name="Text 10"/>
           <p:cNvSpPr/>
           <p:nvPr/>
         </p:nvSpPr>
@@ -19451,7 +21011,7 @@
       </p:sp>
       <p:sp>
         <p:nvSpPr>
-          <p:cNvPr id="11" name="Text 9"/>
+          <p:cNvPr id="13" name="Text 11"/>
           <p:cNvSpPr/>
           <p:nvPr/>
         </p:nvSpPr>
@@ -19490,7 +21050,7 @@
       </p:sp>
       <p:sp>
         <p:nvSpPr>
-          <p:cNvPr id="12" name="Text 10"/>
+          <p:cNvPr id="14" name="Text 12"/>
           <p:cNvSpPr/>
           <p:nvPr/>
         </p:nvSpPr>
@@ -19529,7 +21089,7 @@
       </p:sp>
       <p:sp>
         <p:nvSpPr>
-          <p:cNvPr id="13" name="Text 11"/>
+          <p:cNvPr id="15" name="Text 13"/>
           <p:cNvSpPr/>
           <p:nvPr/>
         </p:nvSpPr>
@@ -19568,7 +21128,7 @@
       </p:sp>
       <p:sp>
         <p:nvSpPr>
-          <p:cNvPr id="14" name="Shape 12"/>
+          <p:cNvPr id="16" name="Shape 14"/>
           <p:cNvSpPr/>
           <p:nvPr/>
         </p:nvSpPr>
@@ -19595,7 +21155,7 @@
       </p:sp>
       <p:sp>
         <p:nvSpPr>
-          <p:cNvPr id="15" name="Shape 13"/>
+          <p:cNvPr id="17" name="Shape 15"/>
           <p:cNvSpPr/>
           <p:nvPr/>
         </p:nvSpPr>
@@ -19620,7 +21180,7 @@
       </p:sp>
       <p:sp>
         <p:nvSpPr>
-          <p:cNvPr id="16" name="Text 14"/>
+          <p:cNvPr id="18" name="Text 16"/>
           <p:cNvSpPr/>
           <p:nvPr/>
         </p:nvSpPr>
@@ -19659,7 +21219,7 @@
       </p:sp>
       <p:sp>
         <p:nvSpPr>
-          <p:cNvPr id="17" name="Text 15"/>
+          <p:cNvPr id="19" name="Text 17"/>
           <p:cNvSpPr/>
           <p:nvPr/>
         </p:nvSpPr>
@@ -19698,7 +21258,7 @@
       </p:sp>
       <p:sp>
         <p:nvSpPr>
-          <p:cNvPr id="18" name="Text 16"/>
+          <p:cNvPr id="20" name="Text 18"/>
           <p:cNvSpPr/>
           <p:nvPr/>
         </p:nvSpPr>
@@ -19737,7 +21297,7 @@
       </p:sp>
       <p:sp>
         <p:nvSpPr>
-          <p:cNvPr id="19" name="Text 17"/>
+          <p:cNvPr id="21" name="Text 19"/>
           <p:cNvSpPr/>
           <p:nvPr/>
         </p:nvSpPr>
@@ -19776,7 +21336,7 @@
       </p:sp>
       <p:sp>
         <p:nvSpPr>
-          <p:cNvPr id="20" name="Text 18"/>
+          <p:cNvPr id="22" name="Text 20"/>
           <p:cNvSpPr/>
           <p:nvPr/>
         </p:nvSpPr>
@@ -19815,7 +21375,7 @@
       </p:sp>
       <p:sp>
         <p:nvSpPr>
-          <p:cNvPr id="21" name="Text 19"/>
+          <p:cNvPr id="23" name="Text 21"/>
           <p:cNvSpPr/>
           <p:nvPr/>
         </p:nvSpPr>
@@ -19854,7 +21414,7 @@
       </p:sp>
       <p:sp>
         <p:nvSpPr>
-          <p:cNvPr id="22" name="Text 20"/>
+          <p:cNvPr id="24" name="Text 22"/>
           <p:cNvSpPr/>
           <p:nvPr/>
         </p:nvSpPr>
